--- a/bod-app-sales-deck/samples/Bod-App-Sample-Slides.pptx
+++ b/bod-app-sales-deck/samples/Bod-App-Sample-Slides.pptx
@@ -504,7 +504,7 @@
           <a:p>
             <a:r>
               <a:rPr lang="en-US" dirty="0"/>
-              <a:t>Open light. Bod Annan greets the room; the phone shows the real home screen.</a:t>
+              <a:t>Open light. Bod Annan greets the room; the phone shows the home screen.</a:t>
             </a:r>
             <a:endParaRPr lang="en-US" dirty="0"/>
           </a:p>
@@ -680,7 +680,7 @@
           <a:p>
             <a:r>
               <a:rPr lang="en-US" dirty="0"/>
-              <a:t>Walk the six steps left to right. Ask which step hurts most in their studio today.</a:t>
+              <a:t>Usually: briefs arrive on WhatsApp at 11 pm, nobody knows who owns what, status lives in people's heads, the client goes quiet for three days, and finished work sits unbilled. With Bod App each of those steps is handled.</a:t>
             </a:r>
             <a:endParaRPr lang="en-US" dirty="0"/>
           </a:p>
@@ -1069,8 +1069,8 @@
         </p:blipFill>
         <p:spPr>
           <a:xfrm>
-            <a:off x="6035040" y="-1097280"/>
-            <a:ext cx="7680960" cy="7680960"/>
+            <a:off x="6798445" y="-457200"/>
+            <a:ext cx="6719130" cy="6719130"/>
           </a:xfrm>
           <a:prstGeom prst="rect">
             <a:avLst/>
@@ -1093,8 +1093,8 @@
         </p:blipFill>
         <p:spPr>
           <a:xfrm>
-            <a:off x="548640" y="502920"/>
-            <a:ext cx="512064" cy="512064"/>
+            <a:off x="685800" y="640080"/>
+            <a:ext cx="457200" cy="457200"/>
           </a:xfrm>
           <a:prstGeom prst="rect">
             <a:avLst/>
@@ -1109,8 +1109,8 @@
         </p:nvSpPr>
         <p:spPr>
           <a:xfrm>
-            <a:off x="1207008" y="658368"/>
-            <a:ext cx="3657600" cy="219456"/>
+            <a:off x="1325880" y="768096"/>
+            <a:ext cx="3657600" cy="201168"/>
           </a:xfrm>
           <a:prstGeom prst="rect">
             <a:avLst/>
@@ -1126,7 +1126,7 @@
               <a:buNone/>
             </a:pPr>
             <a:r>
-              <a:rPr lang="en-US" sz="900" b="1" spc="200" kern="0" dirty="0">
+              <a:rPr lang="en-US" sz="1000" b="1" spc="200" kern="0" dirty="0">
                 <a:solidFill>
                   <a:srgbClr val="9AA7A2"/>
                 </a:solidFill>
@@ -1136,7 +1136,7 @@
               </a:rPr>
               <a:t>A BOD STUDIO PRODUCT</a:t>
             </a:r>
-            <a:endParaRPr lang="en-US" sz="900" dirty="0"/>
+            <a:endParaRPr lang="en-US" sz="1000" dirty="0"/>
           </a:p>
         </p:txBody>
       </p:sp>
@@ -1148,24 +1148,24 @@
         </p:nvSpPr>
         <p:spPr>
           <a:xfrm>
-            <a:off x="548640" y="1691640"/>
-            <a:ext cx="6400800" cy="1371600"/>
-          </a:xfrm>
-          <a:prstGeom prst="rect">
-            <a:avLst/>
-          </a:prstGeom>
-          <a:noFill/>
-          <a:ln/>
-        </p:spPr>
-        <p:txBody>
-          <a:bodyPr wrap="square" lIns="0" tIns="0" rIns="0" bIns="0" rtlCol="0" anchor="t"/>
+            <a:off x="685800" y="2148840"/>
+            <a:ext cx="6216472" cy="1280160"/>
+          </a:xfrm>
+          <a:prstGeom prst="rect">
+            <a:avLst/>
+          </a:prstGeom>
+          <a:noFill/>
+          <a:ln/>
+        </p:spPr>
+        <p:txBody>
+          <a:bodyPr wrap="square" lIns="0" tIns="0" rIns="0" bIns="0" rtlCol="0" anchor="b"/>
           <a:lstStyle/>
           <a:p>
             <a:pPr indent="0" marL="0">
               <a:buNone/>
             </a:pPr>
             <a:r>
-              <a:rPr lang="en-US" sz="9200" b="1" dirty="0">
+              <a:rPr lang="en-US" sz="8800" b="1" dirty="0">
                 <a:solidFill>
                   <a:srgbClr val="F4F6F5"/>
                 </a:solidFill>
@@ -1175,7 +1175,7 @@
               </a:rPr>
               <a:t>Bod App</a:t>
             </a:r>
-            <a:endParaRPr lang="en-US" sz="9200" dirty="0"/>
+            <a:endParaRPr lang="en-US" sz="8800" dirty="0"/>
           </a:p>
         </p:txBody>
       </p:sp>
@@ -1187,8 +1187,8 @@
         </p:nvSpPr>
         <p:spPr>
           <a:xfrm>
-            <a:off x="548640" y="3108960"/>
-            <a:ext cx="6400800" cy="548640"/>
+            <a:off x="685800" y="3520440"/>
+            <a:ext cx="6216472" cy="457200"/>
           </a:xfrm>
           <a:prstGeom prst="rect">
             <a:avLst/>
@@ -1204,17 +1204,17 @@
               <a:buNone/>
             </a:pPr>
             <a:r>
-              <a:rPr lang="en-US" sz="2800" b="1" i="1" dirty="0">
+              <a:rPr lang="en-US" sz="2600" b="1" dirty="0">
                 <a:solidFill>
                   <a:srgbClr val="B8E62E"/>
                 </a:solidFill>
-                <a:latin typeface="Fraunces" pitchFamily="34" charset="0"/>
-                <a:ea typeface="Fraunces" pitchFamily="34" charset="-122"/>
-                <a:cs typeface="Fraunces" pitchFamily="34" charset="-120"/>
+                <a:latin typeface="Epilogue" pitchFamily="34" charset="0"/>
+                <a:ea typeface="Epilogue" pitchFamily="34" charset="-122"/>
+                <a:cs typeface="Epilogue" pitchFamily="34" charset="-120"/>
               </a:rPr>
               <a:t>The task app for creative agencies.</a:t>
             </a:r>
-            <a:endParaRPr lang="en-US" sz="2800" dirty="0"/>
+            <a:endParaRPr lang="en-US" sz="2600" dirty="0"/>
           </a:p>
         </p:txBody>
       </p:sp>
@@ -1226,8 +1226,8 @@
         </p:nvSpPr>
         <p:spPr>
           <a:xfrm>
-            <a:off x="548640" y="3749040"/>
-            <a:ext cx="5120640" cy="731520"/>
+            <a:off x="685800" y="4069080"/>
+            <a:ext cx="4375023" cy="731520"/>
           </a:xfrm>
           <a:prstGeom prst="rect">
             <a:avLst/>
@@ -1241,7 +1241,7 @@
           <a:p>
             <a:pPr indent="0" marL="0">
               <a:lnSpc>
-                <a:spcPct val="120000"/>
+                <a:spcPct val="125000"/>
               </a:lnSpc>
               <a:buNone/>
             </a:pPr>
@@ -1268,8 +1268,8 @@
         </p:nvSpPr>
         <p:spPr>
           <a:xfrm>
-            <a:off x="548640" y="6400800"/>
-            <a:ext cx="3657600" cy="228600"/>
+            <a:off x="685800" y="6355080"/>
+            <a:ext cx="3657600" cy="201168"/>
           </a:xfrm>
           <a:prstGeom prst="rect">
             <a:avLst/>
@@ -1285,7 +1285,7 @@
               <a:buNone/>
             </a:pPr>
             <a:r>
-              <a:rPr lang="en-US" sz="900" b="1" spc="100" kern="0" dirty="0">
+              <a:rPr lang="en-US" sz="1000" b="1" spc="200" kern="0" dirty="0">
                 <a:solidFill>
                   <a:srgbClr val="6B7773"/>
                 </a:solidFill>
@@ -1293,15 +1293,15 @@
                 <a:ea typeface="Plus Jakarta Sans" pitchFamily="34" charset="-122"/>
                 <a:cs typeface="Plus Jakarta Sans" pitchFamily="34" charset="-120"/>
               </a:rPr>
-              <a:t>mybodstudio.com</a:t>
-            </a:r>
-            <a:endParaRPr lang="en-US" sz="900" dirty="0"/>
+              <a:t>MYBODSTUDIO.COM</a:t>
+            </a:r>
+            <a:endParaRPr lang="en-US" sz="1000" dirty="0"/>
           </a:p>
         </p:txBody>
       </p:sp>
       <p:pic>
         <p:nvPicPr>
-          <p:cNvPr id="9" name="Image 2" descr="/tmp/claude-0/-home-user-Claude-Works/c609e3f7-e17f-5f43-8424-4df30cb9a6a9/scratchpad/build/s/img/home_dark.png">    </p:cNvPr>
+          <p:cNvPr id="9" name="Image 2" descr="/tmp/claude-0/-home-user-Claude-Works/c609e3f7-e17f-5f43-8424-4df30cb9a6a9/scratchpad/build/s/img/m_front_home_dark.png">    </p:cNvPr>
           <p:cNvPicPr>
             <a:picLocks noChangeAspect="1"/>
           </p:cNvPicPr>
@@ -1314,9 +1314,9 @@
           </a:stretch>
         </p:blipFill>
         <p:spPr>
-          <a:xfrm rot="300000">
-            <a:off x="8549640" y="457200"/>
-            <a:ext cx="2830937" cy="5943600"/>
+          <a:xfrm>
+            <a:off x="8810125" y="640080"/>
+            <a:ext cx="2695770" cy="5577840"/>
           </a:xfrm>
           <a:prstGeom prst="rect">
             <a:avLst/>
@@ -1339,8 +1339,8 @@
         </p:blipFill>
         <p:spPr>
           <a:xfrm>
-            <a:off x="6400800" y="3611880"/>
-            <a:ext cx="2905305" cy="2926080"/>
+            <a:off x="6633094" y="3749040"/>
+            <a:ext cx="2451351" cy="2468880"/>
           </a:xfrm>
           <a:prstGeom prst="rect">
             <a:avLst/>
@@ -1355,25 +1355,18 @@
         </p:nvSpPr>
         <p:spPr>
           <a:xfrm>
-            <a:off x="6629400" y="2606040"/>
-            <a:ext cx="2514600" cy="777240"/>
+            <a:off x="6998854" y="2788920"/>
+            <a:ext cx="2377440" cy="713232"/>
           </a:xfrm>
           <a:prstGeom prst="roundRect">
             <a:avLst>
-              <a:gd name="adj" fmla="val 25882"/>
+              <a:gd name="adj" fmla="val 25641"/>
             </a:avLst>
           </a:prstGeom>
           <a:solidFill>
             <a:srgbClr val="F4F6F5"/>
           </a:solidFill>
           <a:ln/>
-          <a:effectLst>
-            <a:outerShdw sx="100000" sy="100000" kx="0" ky="0" algn="bl" rotWithShape="0" blurRad="127000" dist="38100" dir="5400000">
-              <a:srgbClr val="000000">
-                <a:alpha val="35000"/>
-              </a:srgbClr>
-            </a:outerShdw>
-          </a:effectLst>
         </p:spPr>
       </p:sp>
       <p:sp>
@@ -1384,8 +1377,8 @@
         </p:nvSpPr>
         <p:spPr>
           <a:xfrm rot="10800000">
-            <a:off x="7040880" y="3364992"/>
-            <a:ext cx="237744" cy="237744"/>
+            <a:off x="7638934" y="3493008"/>
+            <a:ext cx="219456" cy="175565"/>
           </a:xfrm>
           <a:prstGeom prst="triangle">
             <a:avLst/>
@@ -1404,8 +1397,8 @@
         </p:nvSpPr>
         <p:spPr>
           <a:xfrm>
-            <a:off x="6858000" y="2606040"/>
-            <a:ext cx="2057400" cy="777240"/>
+            <a:off x="7227454" y="2788920"/>
+            <a:ext cx="1920240" cy="713232"/>
           </a:xfrm>
           <a:prstGeom prst="rect">
             <a:avLst/>
@@ -1486,8 +1479,8 @@
         </p:blipFill>
         <p:spPr>
           <a:xfrm>
-            <a:off x="6217920" y="-822960"/>
-            <a:ext cx="7132320" cy="7132320"/>
+            <a:off x="5667832" y="-548640"/>
+            <a:ext cx="6949440" cy="6949440"/>
           </a:xfrm>
           <a:prstGeom prst="rect">
             <a:avLst/>
@@ -1502,8 +1495,8 @@
         </p:nvSpPr>
         <p:spPr>
           <a:xfrm>
-            <a:off x="548640" y="868680"/>
-            <a:ext cx="2743200" cy="548640"/>
+            <a:off x="685800" y="640080"/>
+            <a:ext cx="2743200" cy="201168"/>
           </a:xfrm>
           <a:prstGeom prst="rect">
             <a:avLst/>
@@ -1519,17 +1512,17 @@
               <a:buNone/>
             </a:pPr>
             <a:r>
-              <a:rPr lang="en-US" sz="3400" b="1" i="1" dirty="0">
+              <a:rPr lang="en-US" sz="1000" b="1" spc="200" kern="0" dirty="0">
                 <a:solidFill>
                   <a:srgbClr val="B8E62E"/>
                 </a:solidFill>
-                <a:latin typeface="Fraunces" pitchFamily="34" charset="0"/>
-                <a:ea typeface="Fraunces" pitchFamily="34" charset="-122"/>
-                <a:cs typeface="Fraunces" pitchFamily="34" charset="-120"/>
+                <a:latin typeface="Plus Jakarta Sans" pitchFamily="34" charset="0"/>
+                <a:ea typeface="Plus Jakarta Sans" pitchFamily="34" charset="-122"/>
+                <a:cs typeface="Plus Jakarta Sans" pitchFamily="34" charset="-120"/>
               </a:rPr>
-              <a:t>3 pm</a:t>
-            </a:r>
-            <a:endParaRPr lang="en-US" sz="3400" dirty="0"/>
+              <a:t>3 PM</a:t>
+            </a:r>
+            <a:endParaRPr lang="en-US" sz="1000" dirty="0"/>
           </a:p>
         </p:txBody>
       </p:sp>
@@ -1541,8 +1534,8 @@
         </p:nvSpPr>
         <p:spPr>
           <a:xfrm>
-            <a:off x="548640" y="1463040"/>
-            <a:ext cx="6035040" cy="1463040"/>
+            <a:off x="685800" y="1005840"/>
+            <a:ext cx="5295748" cy="1417320"/>
           </a:xfrm>
           <a:prstGeom prst="rect">
             <a:avLst/>
@@ -1555,6 +1548,9 @@
           <a:lstStyle/>
           <a:p>
             <a:pPr indent="0" marL="0">
+              <a:lnSpc>
+                <a:spcPct val="100000"/>
+              </a:lnSpc>
               <a:buNone/>
             </a:pPr>
             <a:r>
@@ -1572,6 +1568,9 @@
           </a:p>
           <a:p>
             <a:pPr indent="0" marL="0">
+              <a:lnSpc>
+                <a:spcPct val="100000"/>
+              </a:lnSpc>
               <a:buNone/>
             </a:pPr>
             <a:r>
@@ -1597,8 +1596,8 @@
         </p:nvSpPr>
         <p:spPr>
           <a:xfrm>
-            <a:off x="548640" y="3017520"/>
-            <a:ext cx="5303520" cy="731520"/>
+            <a:off x="685800" y="2560320"/>
+            <a:ext cx="4375023" cy="777240"/>
           </a:xfrm>
           <a:prstGeom prst="rect">
             <a:avLst/>
@@ -1647,8 +1646,8 @@
         </p:blipFill>
         <p:spPr>
           <a:xfrm>
-            <a:off x="502920" y="4069080"/>
-            <a:ext cx="2362224" cy="2377440"/>
+            <a:off x="548640" y="3931920"/>
+            <a:ext cx="2225942" cy="2240280"/>
           </a:xfrm>
           <a:prstGeom prst="rect">
             <a:avLst/>
@@ -1663,25 +1662,18 @@
         </p:nvSpPr>
         <p:spPr>
           <a:xfrm>
-            <a:off x="3154680" y="4297680"/>
-            <a:ext cx="3017520" cy="822960"/>
+            <a:off x="3094622" y="4251960"/>
+            <a:ext cx="2514600" cy="777240"/>
           </a:xfrm>
           <a:prstGeom prst="roundRect">
             <a:avLst>
-              <a:gd name="adj" fmla="val 24444"/>
+              <a:gd name="adj" fmla="val 23529"/>
             </a:avLst>
           </a:prstGeom>
           <a:solidFill>
             <a:srgbClr val="F4F6F5"/>
           </a:solidFill>
           <a:ln/>
-          <a:effectLst>
-            <a:outerShdw sx="100000" sy="100000" kx="0" ky="0" algn="bl" rotWithShape="0" blurRad="127000" dist="38100" dir="5400000">
-              <a:srgbClr val="000000">
-                <a:alpha val="35000"/>
-              </a:srgbClr>
-            </a:outerShdw>
-          </a:effectLst>
         </p:spPr>
       </p:sp>
       <p:sp>
@@ -1692,8 +1684,8 @@
         </p:nvSpPr>
         <p:spPr>
           <a:xfrm rot="16200000">
-            <a:off x="2953512" y="4590288"/>
-            <a:ext cx="237744" cy="237744"/>
+            <a:off x="2928201" y="4530852"/>
+            <a:ext cx="219456" cy="175565"/>
           </a:xfrm>
           <a:prstGeom prst="triangle">
             <a:avLst/>
@@ -1712,8 +1704,8 @@
         </p:nvSpPr>
         <p:spPr>
           <a:xfrm>
-            <a:off x="3383280" y="4297680"/>
-            <a:ext cx="2560320" cy="822960"/>
+            <a:off x="3323222" y="4251960"/>
+            <a:ext cx="2057400" cy="777240"/>
           </a:xfrm>
           <a:prstGeom prst="rect">
             <a:avLst/>
@@ -1748,7 +1740,7 @@
       </p:sp>
       <p:pic>
         <p:nvPicPr>
-          <p:cNvPr id="10" name="Image 2" descr="/tmp/claude-0/-home-user-Claude-Works/c609e3f7-e17f-5f43-8424-4df30cb9a6a9/scratchpad/build/s/img/nudge_light.png">    </p:cNvPr>
+          <p:cNvPr id="10" name="Image 2" descr="/tmp/claude-0/-home-user-Claude-Works/c609e3f7-e17f-5f43-8424-4df30cb9a6a9/scratchpad/build/s/img/m_front_nudge_light.png">    </p:cNvPr>
           <p:cNvPicPr>
             <a:picLocks noChangeAspect="1"/>
           </p:cNvPicPr>
@@ -1761,9 +1753,9 @@
           </a:stretch>
         </p:blipFill>
         <p:spPr>
-          <a:xfrm rot="420000">
-            <a:off x="9372600" y="914400"/>
-            <a:ext cx="2459581" cy="5212080"/>
+          <a:xfrm>
+            <a:off x="9163669" y="1325880"/>
+            <a:ext cx="2342226" cy="4846320"/>
           </a:xfrm>
           <a:prstGeom prst="rect">
             <a:avLst/>
@@ -1772,7 +1764,7 @@
       </p:pic>
       <p:pic>
         <p:nvPicPr>
-          <p:cNvPr id="11" name="Image 3" descr="/tmp/claude-0/-home-user-Claude-Works/c609e3f7-e17f-5f43-8424-4df30cb9a6a9/scratchpad/build/s/img/nudge_dark.png">    </p:cNvPr>
+          <p:cNvPr id="11" name="Image 3" descr="/tmp/claude-0/-home-user-Claude-Works/c609e3f7-e17f-5f43-8424-4df30cb9a6a9/scratchpad/build/s/img/m_front_nudge_dark.png">    </p:cNvPr>
           <p:cNvPicPr>
             <a:picLocks noChangeAspect="1"/>
           </p:cNvPicPr>
@@ -1786,8 +1778,8 @@
         </p:blipFill>
         <p:spPr>
           <a:xfrm>
-            <a:off x="6903720" y="457200"/>
-            <a:ext cx="2783210" cy="5897880"/>
+            <a:off x="7130872" y="685800"/>
+            <a:ext cx="2651577" cy="5486400"/>
           </a:xfrm>
           <a:prstGeom prst="rect">
             <a:avLst/>
@@ -1802,8 +1794,8 @@
         </p:nvSpPr>
         <p:spPr>
           <a:xfrm>
-            <a:off x="6903720" y="6400800"/>
-            <a:ext cx="2788920" cy="201168"/>
+            <a:off x="7130872" y="6355080"/>
+            <a:ext cx="2651577" cy="201168"/>
           </a:xfrm>
           <a:prstGeom prst="rect">
             <a:avLst/>
@@ -1819,7 +1811,7 @@
               <a:buNone/>
             </a:pPr>
             <a:r>
-              <a:rPr lang="en-US" sz="800" b="1" spc="200" kern="0" dirty="0">
+              <a:rPr lang="en-US" sz="1000" b="1" spc="200" kern="0" dirty="0">
                 <a:solidFill>
                   <a:srgbClr val="6B7773"/>
                 </a:solidFill>
@@ -1827,9 +1819,9 @@
                 <a:ea typeface="Plus Jakarta Sans" pitchFamily="34" charset="-122"/>
                 <a:cs typeface="Plus Jakarta Sans" pitchFamily="34" charset="-120"/>
               </a:rPr>
-              <a:t>Dark theme</a:t>
-            </a:r>
-            <a:endParaRPr lang="en-US" sz="800" dirty="0"/>
+              <a:t>DARK THEME</a:t>
+            </a:r>
+            <a:endParaRPr lang="en-US" sz="1000" dirty="0"/>
           </a:p>
         </p:txBody>
       </p:sp>
@@ -1841,8 +1833,8 @@
         </p:nvSpPr>
         <p:spPr>
           <a:xfrm>
-            <a:off x="9646920" y="6400800"/>
-            <a:ext cx="2377440" cy="201168"/>
+            <a:off x="9782449" y="6355080"/>
+            <a:ext cx="1723446" cy="201168"/>
           </a:xfrm>
           <a:prstGeom prst="rect">
             <a:avLst/>
@@ -1858,7 +1850,7 @@
               <a:buNone/>
             </a:pPr>
             <a:r>
-              <a:rPr lang="en-US" sz="800" b="1" spc="200" kern="0" dirty="0">
+              <a:rPr lang="en-US" sz="1000" b="1" spc="200" kern="0" dirty="0">
                 <a:solidFill>
                   <a:srgbClr val="6B7773"/>
                 </a:solidFill>
@@ -1866,9 +1858,48 @@
                 <a:ea typeface="Plus Jakarta Sans" pitchFamily="34" charset="-122"/>
                 <a:cs typeface="Plus Jakarta Sans" pitchFamily="34" charset="-120"/>
               </a:rPr>
-              <a:t>Light theme</a:t>
-            </a:r>
-            <a:endParaRPr lang="en-US" sz="800" dirty="0"/>
+              <a:t>LIGHT THEME</a:t>
+            </a:r>
+            <a:endParaRPr lang="en-US" sz="1000" dirty="0"/>
+          </a:p>
+        </p:txBody>
+      </p:sp>
+      <p:sp>
+        <p:nvSpPr>
+          <p:cNvPr id="14" name="Text 8"/>
+          <p:cNvSpPr txBox="1"/>
+          <p:nvPr/>
+        </p:nvSpPr>
+        <p:spPr>
+          <a:xfrm>
+            <a:off x="685800" y="6355080"/>
+            <a:ext cx="5029200" cy="201168"/>
+          </a:xfrm>
+          <a:prstGeom prst="rect">
+            <a:avLst/>
+          </a:prstGeom>
+          <a:noFill/>
+          <a:ln/>
+        </p:spPr>
+        <p:txBody>
+          <a:bodyPr wrap="square" lIns="0" tIns="0" rIns="0" bIns="0" rtlCol="0" anchor="t"/>
+          <a:lstStyle/>
+          <a:p>
+            <a:pPr indent="0" marL="0">
+              <a:buNone/>
+            </a:pPr>
+            <a:r>
+              <a:rPr lang="en-US" sz="1000" b="1" spc="200" kern="0" dirty="0">
+                <a:solidFill>
+                  <a:srgbClr val="6B7773"/>
+                </a:solidFill>
+                <a:latin typeface="Plus Jakarta Sans" pitchFamily="34" charset="0"/>
+                <a:ea typeface="Plus Jakarta Sans" pitchFamily="34" charset="-122"/>
+                <a:cs typeface="Plus Jakarta Sans" pitchFamily="34" charset="-120"/>
+              </a:rPr>
+              <a:t>BOD APP  ·  THE TASK APP FOR CREATIVE AGENCIES</a:t>
+            </a:r>
+            <a:endParaRPr lang="en-US" sz="1000" dirty="0"/>
           </a:p>
         </p:txBody>
       </p:sp>
@@ -1912,8 +1943,8 @@
         </p:nvSpPr>
         <p:spPr>
           <a:xfrm>
-            <a:off x="548640" y="502920"/>
-            <a:ext cx="3657600" cy="219456"/>
+            <a:off x="685800" y="640080"/>
+            <a:ext cx="3657600" cy="201168"/>
           </a:xfrm>
           <a:prstGeom prst="rect">
             <a:avLst/>
@@ -1951,8 +1982,8 @@
         </p:nvSpPr>
         <p:spPr>
           <a:xfrm>
-            <a:off x="548640" y="822960"/>
-            <a:ext cx="6400800" cy="731520"/>
+            <a:off x="685800" y="1005840"/>
+            <a:ext cx="7137197" cy="731520"/>
           </a:xfrm>
           <a:prstGeom prst="rect">
             <a:avLst/>
@@ -1968,7 +1999,7 @@
               <a:buNone/>
             </a:pPr>
             <a:r>
-              <a:rPr lang="en-US" sz="4000" b="1" dirty="0">
+              <a:rPr lang="en-US" sz="4400" b="1" dirty="0">
                 <a:solidFill>
                   <a:srgbClr val="F4F6F5"/>
                 </a:solidFill>
@@ -1978,7 +2009,7 @@
               </a:rPr>
               <a:t>From brief to invoice.</a:t>
             </a:r>
-            <a:endParaRPr lang="en-US" sz="4000" dirty="0"/>
+            <a:endParaRPr lang="en-US" sz="4400" dirty="0"/>
           </a:p>
         </p:txBody>
       </p:sp>
@@ -1990,8 +2021,8 @@
         </p:nvSpPr>
         <p:spPr>
           <a:xfrm>
-            <a:off x="548640" y="1554480"/>
-            <a:ext cx="6400800" cy="411480"/>
+            <a:off x="685800" y="1783080"/>
+            <a:ext cx="7137197" cy="411480"/>
           </a:xfrm>
           <a:prstGeom prst="rect">
             <a:avLst/>
@@ -2015,15 +2046,63 @@
                 <a:ea typeface="Manrope" pitchFamily="34" charset="-122"/>
                 <a:cs typeface="Manrope" pitchFamily="34" charset="-120"/>
               </a:rPr>
-              <a:t>Every job, every time.</a:t>
+              <a:t>Every job takes the same five steps.</a:t>
             </a:r>
             <a:endParaRPr lang="en-US" sz="1800" dirty="0"/>
           </a:p>
         </p:txBody>
+      </p:sp>
+      <p:sp>
+        <p:nvSpPr>
+          <p:cNvPr id="5" name="Shape 3"/>
+          <p:cNvSpPr/>
+          <p:nvPr/>
+        </p:nvSpPr>
+        <p:spPr>
+          <a:xfrm>
+            <a:off x="1554480" y="3223260"/>
+            <a:ext cx="8912108" cy="0"/>
+          </a:xfrm>
+          <a:prstGeom prst="line">
+            <a:avLst/>
+          </a:prstGeom>
+          <a:noFill/>
+          <a:ln w="19050">
+            <a:solidFill>
+              <a:srgbClr val="262C2E"/>
+            </a:solidFill>
+            <a:prstDash val="solid"/>
+          </a:ln>
+        </p:spPr>
+      </p:sp>
+      <p:sp>
+        <p:nvSpPr>
+          <p:cNvPr id="6" name="Shape 4"/>
+          <p:cNvSpPr/>
+          <p:nvPr/>
+        </p:nvSpPr>
+        <p:spPr>
+          <a:xfrm>
+            <a:off x="685800" y="2788920"/>
+            <a:ext cx="868680" cy="868680"/>
+          </a:xfrm>
+          <a:prstGeom prst="ellipse">
+            <a:avLst/>
+          </a:prstGeom>
+          <a:solidFill>
+            <a:srgbClr val="15191A"/>
+          </a:solidFill>
+          <a:ln w="12700">
+            <a:solidFill>
+              <a:srgbClr val="262C2E"/>
+            </a:solidFill>
+            <a:prstDash val="solid"/>
+          </a:ln>
+        </p:spPr>
       </p:sp>
       <p:pic>
         <p:nvPicPr>
-          <p:cNvPr id="5" name="Image 0" descr="/tmp/claude-0/-home-user-Claude-Works/c609e3f7-e17f-5f43-8424-4df30cb9a6a9/scratchpad/build/s/img/annan_proud.png">    </p:cNvPr>
+          <p:cNvPr id="7" name="Image 0" descr="preencoded.png">    </p:cNvPr>
           <p:cNvPicPr>
             <a:picLocks noChangeAspect="1"/>
           </p:cNvPicPr>
@@ -2037,8 +2116,8 @@
         </p:blipFill>
         <p:spPr>
           <a:xfrm>
-            <a:off x="10287000" y="274320"/>
-            <a:ext cx="1481205" cy="1783080"/>
+            <a:off x="929030" y="3032150"/>
+            <a:ext cx="382219" cy="382219"/>
           </a:xfrm>
           <a:prstGeom prst="rect">
             <a:avLst/>
@@ -2047,43 +2126,871 @@
       </p:pic>
       <p:sp>
         <p:nvSpPr>
-          <p:cNvPr id="6" name="Shape 3"/>
+          <p:cNvPr id="8" name="Text 5"/>
+          <p:cNvSpPr txBox="1"/>
+          <p:nvPr/>
+        </p:nvSpPr>
+        <p:spPr>
+          <a:xfrm>
+            <a:off x="685800" y="3977640"/>
+            <a:ext cx="1907987" cy="201168"/>
+          </a:xfrm>
+          <a:prstGeom prst="rect">
+            <a:avLst/>
+          </a:prstGeom>
+          <a:noFill/>
+          <a:ln/>
+        </p:spPr>
+        <p:txBody>
+          <a:bodyPr wrap="square" lIns="0" tIns="0" rIns="0" bIns="0" rtlCol="0" anchor="t"/>
+          <a:lstStyle/>
+          <a:p>
+            <a:pPr indent="0" marL="0">
+              <a:buNone/>
+            </a:pPr>
+            <a:r>
+              <a:rPr lang="en-US" sz="1000" b="1" spc="200" kern="0" dirty="0">
+                <a:solidFill>
+                  <a:srgbClr val="6B7773"/>
+                </a:solidFill>
+                <a:latin typeface="Plus Jakarta Sans" pitchFamily="34" charset="0"/>
+                <a:ea typeface="Plus Jakarta Sans" pitchFamily="34" charset="-122"/>
+                <a:cs typeface="Plus Jakarta Sans" pitchFamily="34" charset="-120"/>
+              </a:rPr>
+              <a:t>STEP 1</a:t>
+            </a:r>
+            <a:endParaRPr lang="en-US" sz="1000" dirty="0"/>
+          </a:p>
+        </p:txBody>
+      </p:sp>
+      <p:sp>
+        <p:nvSpPr>
+          <p:cNvPr id="9" name="Text 6"/>
+          <p:cNvSpPr txBox="1"/>
+          <p:nvPr/>
+        </p:nvSpPr>
+        <p:spPr>
+          <a:xfrm>
+            <a:off x="685800" y="4251960"/>
+            <a:ext cx="1907987" cy="731520"/>
+          </a:xfrm>
+          <a:prstGeom prst="rect">
+            <a:avLst/>
+          </a:prstGeom>
+          <a:noFill/>
+          <a:ln/>
+        </p:spPr>
+        <p:txBody>
+          <a:bodyPr wrap="square" lIns="0" tIns="0" rIns="0" bIns="0" rtlCol="0" anchor="t"/>
+          <a:lstStyle/>
+          <a:p>
+            <a:pPr indent="0" marL="0">
+              <a:lnSpc>
+                <a:spcPct val="100000"/>
+              </a:lnSpc>
+              <a:buNone/>
+            </a:pPr>
+            <a:r>
+              <a:rPr lang="en-US" sz="2200" b="1" dirty="0">
+                <a:solidFill>
+                  <a:srgbClr val="F4F6F5"/>
+                </a:solidFill>
+                <a:latin typeface="Epilogue" pitchFamily="34" charset="0"/>
+                <a:ea typeface="Epilogue" pitchFamily="34" charset="-122"/>
+                <a:cs typeface="Epilogue" pitchFamily="34" charset="-120"/>
+              </a:rPr>
+              <a:t>Brief comes in</a:t>
+            </a:r>
+            <a:endParaRPr lang="en-US" sz="2200" dirty="0"/>
+          </a:p>
+        </p:txBody>
+      </p:sp>
+      <p:sp>
+        <p:nvSpPr>
+          <p:cNvPr id="10" name="Text 7"/>
+          <p:cNvSpPr txBox="1"/>
+          <p:nvPr/>
+        </p:nvSpPr>
+        <p:spPr>
+          <a:xfrm>
+            <a:off x="685800" y="5074920"/>
+            <a:ext cx="1907987" cy="640080"/>
+          </a:xfrm>
+          <a:prstGeom prst="rect">
+            <a:avLst/>
+          </a:prstGeom>
+          <a:noFill/>
+          <a:ln/>
+        </p:spPr>
+        <p:txBody>
+          <a:bodyPr wrap="square" lIns="0" tIns="0" rIns="0" bIns="0" rtlCol="0" anchor="t"/>
+          <a:lstStyle/>
+          <a:p>
+            <a:pPr indent="0" marL="0">
+              <a:lnSpc>
+                <a:spcPct val="125000"/>
+              </a:lnSpc>
+              <a:buNone/>
+            </a:pPr>
+            <a:r>
+              <a:rPr lang="en-US" sz="1500" dirty="0">
+                <a:solidFill>
+                  <a:srgbClr val="9AA7A2"/>
+                </a:solidFill>
+                <a:latin typeface="Manrope" pitchFamily="34" charset="0"/>
+                <a:ea typeface="Manrope" pitchFamily="34" charset="-122"/>
+                <a:cs typeface="Manrope" pitchFamily="34" charset="-120"/>
+              </a:rPr>
+              <a:t>Say it, type it or drop the PDF.</a:t>
+            </a:r>
+            <a:endParaRPr lang="en-US" sz="1500" dirty="0"/>
+          </a:p>
+        </p:txBody>
+      </p:sp>
+      <p:sp>
+        <p:nvSpPr>
+          <p:cNvPr id="11" name="Shape 8"/>
           <p:cNvSpPr/>
           <p:nvPr/>
         </p:nvSpPr>
         <p:spPr>
           <a:xfrm>
-            <a:off x="7178040" y="685800"/>
-            <a:ext cx="2880360" cy="777240"/>
+            <a:off x="2913827" y="2788920"/>
+            <a:ext cx="868680" cy="868680"/>
+          </a:xfrm>
+          <a:prstGeom prst="ellipse">
+            <a:avLst/>
+          </a:prstGeom>
+          <a:solidFill>
+            <a:srgbClr val="15191A"/>
+          </a:solidFill>
+          <a:ln w="12700">
+            <a:solidFill>
+              <a:srgbClr val="262C2E"/>
+            </a:solidFill>
+            <a:prstDash val="solid"/>
+          </a:ln>
+        </p:spPr>
+      </p:sp>
+      <p:pic>
+        <p:nvPicPr>
+          <p:cNvPr id="12" name="Image 1" descr="preencoded.png">    </p:cNvPr>
+          <p:cNvPicPr>
+            <a:picLocks noChangeAspect="1"/>
+          </p:cNvPicPr>
+          <p:nvPr/>
+        </p:nvPicPr>
+        <p:blipFill>
+          <a:blip r:embed="rId2"/>
+          <a:stretch>
+            <a:fillRect/>
+          </a:stretch>
+        </p:blipFill>
+        <p:spPr>
+          <a:xfrm>
+            <a:off x="3157057" y="3032150"/>
+            <a:ext cx="382219" cy="382219"/>
+          </a:xfrm>
+          <a:prstGeom prst="rect">
+            <a:avLst/>
+          </a:prstGeom>
+        </p:spPr>
+      </p:pic>
+      <p:sp>
+        <p:nvSpPr>
+          <p:cNvPr id="13" name="Text 9"/>
+          <p:cNvSpPr txBox="1"/>
+          <p:nvPr/>
+        </p:nvSpPr>
+        <p:spPr>
+          <a:xfrm>
+            <a:off x="2913827" y="3977640"/>
+            <a:ext cx="1907987" cy="201168"/>
+          </a:xfrm>
+          <a:prstGeom prst="rect">
+            <a:avLst/>
+          </a:prstGeom>
+          <a:noFill/>
+          <a:ln/>
+        </p:spPr>
+        <p:txBody>
+          <a:bodyPr wrap="square" lIns="0" tIns="0" rIns="0" bIns="0" rtlCol="0" anchor="t"/>
+          <a:lstStyle/>
+          <a:p>
+            <a:pPr indent="0" marL="0">
+              <a:buNone/>
+            </a:pPr>
+            <a:r>
+              <a:rPr lang="en-US" sz="1000" b="1" spc="200" kern="0" dirty="0">
+                <a:solidFill>
+                  <a:srgbClr val="6B7773"/>
+                </a:solidFill>
+                <a:latin typeface="Plus Jakarta Sans" pitchFamily="34" charset="0"/>
+                <a:ea typeface="Plus Jakarta Sans" pitchFamily="34" charset="-122"/>
+                <a:cs typeface="Plus Jakarta Sans" pitchFamily="34" charset="-120"/>
+              </a:rPr>
+              <a:t>STEP 2</a:t>
+            </a:r>
+            <a:endParaRPr lang="en-US" sz="1000" dirty="0"/>
+          </a:p>
+        </p:txBody>
+      </p:sp>
+      <p:sp>
+        <p:nvSpPr>
+          <p:cNvPr id="14" name="Text 10"/>
+          <p:cNvSpPr txBox="1"/>
+          <p:nvPr/>
+        </p:nvSpPr>
+        <p:spPr>
+          <a:xfrm>
+            <a:off x="2913827" y="4251960"/>
+            <a:ext cx="1907987" cy="731520"/>
+          </a:xfrm>
+          <a:prstGeom prst="rect">
+            <a:avLst/>
+          </a:prstGeom>
+          <a:noFill/>
+          <a:ln/>
+        </p:spPr>
+        <p:txBody>
+          <a:bodyPr wrap="square" lIns="0" tIns="0" rIns="0" bIns="0" rtlCol="0" anchor="t"/>
+          <a:lstStyle/>
+          <a:p>
+            <a:pPr indent="0" marL="0">
+              <a:lnSpc>
+                <a:spcPct val="100000"/>
+              </a:lnSpc>
+              <a:buNone/>
+            </a:pPr>
+            <a:r>
+              <a:rPr lang="en-US" sz="2200" b="1" dirty="0">
+                <a:solidFill>
+                  <a:srgbClr val="F4F6F5"/>
+                </a:solidFill>
+                <a:latin typeface="Epilogue" pitchFamily="34" charset="0"/>
+                <a:ea typeface="Epilogue" pitchFamily="34" charset="-122"/>
+                <a:cs typeface="Epilogue" pitchFamily="34" charset="-120"/>
+              </a:rPr>
+              <a:t>Gets assigned</a:t>
+            </a:r>
+            <a:endParaRPr lang="en-US" sz="2200" dirty="0"/>
+          </a:p>
+        </p:txBody>
+      </p:sp>
+      <p:sp>
+        <p:nvSpPr>
+          <p:cNvPr id="15" name="Text 11"/>
+          <p:cNvSpPr txBox="1"/>
+          <p:nvPr/>
+        </p:nvSpPr>
+        <p:spPr>
+          <a:xfrm>
+            <a:off x="2913827" y="5074920"/>
+            <a:ext cx="1907987" cy="640080"/>
+          </a:xfrm>
+          <a:prstGeom prst="rect">
+            <a:avLst/>
+          </a:prstGeom>
+          <a:noFill/>
+          <a:ln/>
+        </p:spPr>
+        <p:txBody>
+          <a:bodyPr wrap="square" lIns="0" tIns="0" rIns="0" bIns="0" rtlCol="0" anchor="t"/>
+          <a:lstStyle/>
+          <a:p>
+            <a:pPr indent="0" marL="0">
+              <a:lnSpc>
+                <a:spcPct val="125000"/>
+              </a:lnSpc>
+              <a:buNone/>
+            </a:pPr>
+            <a:r>
+              <a:rPr lang="en-US" sz="1500" dirty="0">
+                <a:solidFill>
+                  <a:srgbClr val="9AA7A2"/>
+                </a:solidFill>
+                <a:latin typeface="Manrope" pitchFamily="34" charset="0"/>
+                <a:ea typeface="Manrope" pitchFamily="34" charset="-122"/>
+                <a:cs typeface="Manrope" pitchFamily="34" charset="-120"/>
+              </a:rPr>
+              <a:t>The PM approves it once.</a:t>
+            </a:r>
+            <a:endParaRPr lang="en-US" sz="1500" dirty="0"/>
+          </a:p>
+        </p:txBody>
+      </p:sp>
+      <p:sp>
+        <p:nvSpPr>
+          <p:cNvPr id="16" name="Shape 12"/>
+          <p:cNvSpPr/>
+          <p:nvPr/>
+        </p:nvSpPr>
+        <p:spPr>
+          <a:xfrm>
+            <a:off x="5141854" y="2788920"/>
+            <a:ext cx="868680" cy="868680"/>
+          </a:xfrm>
+          <a:prstGeom prst="ellipse">
+            <a:avLst/>
+          </a:prstGeom>
+          <a:solidFill>
+            <a:srgbClr val="15191A"/>
+          </a:solidFill>
+          <a:ln w="12700">
+            <a:solidFill>
+              <a:srgbClr val="262C2E"/>
+            </a:solidFill>
+            <a:prstDash val="solid"/>
+          </a:ln>
+        </p:spPr>
+      </p:sp>
+      <p:pic>
+        <p:nvPicPr>
+          <p:cNvPr id="17" name="Image 2" descr="preencoded.png">    </p:cNvPr>
+          <p:cNvPicPr>
+            <a:picLocks noChangeAspect="1"/>
+          </p:cNvPicPr>
+          <p:nvPr/>
+        </p:nvPicPr>
+        <p:blipFill>
+          <a:blip r:embed="rId3"/>
+          <a:stretch>
+            <a:fillRect/>
+          </a:stretch>
+        </p:blipFill>
+        <p:spPr>
+          <a:xfrm>
+            <a:off x="5385084" y="3032150"/>
+            <a:ext cx="382219" cy="382219"/>
+          </a:xfrm>
+          <a:prstGeom prst="rect">
+            <a:avLst/>
+          </a:prstGeom>
+        </p:spPr>
+      </p:pic>
+      <p:sp>
+        <p:nvSpPr>
+          <p:cNvPr id="18" name="Text 13"/>
+          <p:cNvSpPr txBox="1"/>
+          <p:nvPr/>
+        </p:nvSpPr>
+        <p:spPr>
+          <a:xfrm>
+            <a:off x="5141854" y="3977640"/>
+            <a:ext cx="1907987" cy="201168"/>
+          </a:xfrm>
+          <a:prstGeom prst="rect">
+            <a:avLst/>
+          </a:prstGeom>
+          <a:noFill/>
+          <a:ln/>
+        </p:spPr>
+        <p:txBody>
+          <a:bodyPr wrap="square" lIns="0" tIns="0" rIns="0" bIns="0" rtlCol="0" anchor="t"/>
+          <a:lstStyle/>
+          <a:p>
+            <a:pPr indent="0" marL="0">
+              <a:buNone/>
+            </a:pPr>
+            <a:r>
+              <a:rPr lang="en-US" sz="1000" b="1" spc="200" kern="0" dirty="0">
+                <a:solidFill>
+                  <a:srgbClr val="6B7773"/>
+                </a:solidFill>
+                <a:latin typeface="Plus Jakarta Sans" pitchFamily="34" charset="0"/>
+                <a:ea typeface="Plus Jakarta Sans" pitchFamily="34" charset="-122"/>
+                <a:cs typeface="Plus Jakarta Sans" pitchFamily="34" charset="-120"/>
+              </a:rPr>
+              <a:t>STEP 3</a:t>
+            </a:r>
+            <a:endParaRPr lang="en-US" sz="1000" dirty="0"/>
+          </a:p>
+        </p:txBody>
+      </p:sp>
+      <p:sp>
+        <p:nvSpPr>
+          <p:cNvPr id="19" name="Text 14"/>
+          <p:cNvSpPr txBox="1"/>
+          <p:nvPr/>
+        </p:nvSpPr>
+        <p:spPr>
+          <a:xfrm>
+            <a:off x="5141854" y="4251960"/>
+            <a:ext cx="1907987" cy="731520"/>
+          </a:xfrm>
+          <a:prstGeom prst="rect">
+            <a:avLst/>
+          </a:prstGeom>
+          <a:noFill/>
+          <a:ln/>
+        </p:spPr>
+        <p:txBody>
+          <a:bodyPr wrap="square" lIns="0" tIns="0" rIns="0" bIns="0" rtlCol="0" anchor="t"/>
+          <a:lstStyle/>
+          <a:p>
+            <a:pPr indent="0" marL="0">
+              <a:lnSpc>
+                <a:spcPct val="100000"/>
+              </a:lnSpc>
+              <a:buNone/>
+            </a:pPr>
+            <a:r>
+              <a:rPr lang="en-US" sz="2200" b="1" dirty="0">
+                <a:solidFill>
+                  <a:srgbClr val="F4F6F5"/>
+                </a:solidFill>
+                <a:latin typeface="Epilogue" pitchFamily="34" charset="0"/>
+                <a:ea typeface="Epilogue" pitchFamily="34" charset="-122"/>
+                <a:cs typeface="Epilogue" pitchFamily="34" charset="-120"/>
+              </a:rPr>
+              <a:t>Work happens</a:t>
+            </a:r>
+            <a:endParaRPr lang="en-US" sz="2200" dirty="0"/>
+          </a:p>
+        </p:txBody>
+      </p:sp>
+      <p:sp>
+        <p:nvSpPr>
+          <p:cNvPr id="20" name="Text 15"/>
+          <p:cNvSpPr txBox="1"/>
+          <p:nvPr/>
+        </p:nvSpPr>
+        <p:spPr>
+          <a:xfrm>
+            <a:off x="5141854" y="5074920"/>
+            <a:ext cx="1907987" cy="640080"/>
+          </a:xfrm>
+          <a:prstGeom prst="rect">
+            <a:avLst/>
+          </a:prstGeom>
+          <a:noFill/>
+          <a:ln/>
+        </p:spPr>
+        <p:txBody>
+          <a:bodyPr wrap="square" lIns="0" tIns="0" rIns="0" bIns="0" rtlCol="0" anchor="t"/>
+          <a:lstStyle/>
+          <a:p>
+            <a:pPr indent="0" marL="0">
+              <a:lnSpc>
+                <a:spcPct val="125000"/>
+              </a:lnSpc>
+              <a:buNone/>
+            </a:pPr>
+            <a:r>
+              <a:rPr lang="en-US" sz="1500" dirty="0">
+                <a:solidFill>
+                  <a:srgbClr val="9AA7A2"/>
+                </a:solidFill>
+                <a:latin typeface="Manrope" pitchFamily="34" charset="0"/>
+                <a:ea typeface="Manrope" pitchFamily="34" charset="-122"/>
+                <a:cs typeface="Manrope" pitchFamily="34" charset="-120"/>
+              </a:rPr>
+              <a:t>Everyone can see where it's at.</a:t>
+            </a:r>
+            <a:endParaRPr lang="en-US" sz="1500" dirty="0"/>
+          </a:p>
+        </p:txBody>
+      </p:sp>
+      <p:sp>
+        <p:nvSpPr>
+          <p:cNvPr id="21" name="Shape 16"/>
+          <p:cNvSpPr/>
+          <p:nvPr/>
+        </p:nvSpPr>
+        <p:spPr>
+          <a:xfrm>
+            <a:off x="7369881" y="2788920"/>
+            <a:ext cx="868680" cy="868680"/>
+          </a:xfrm>
+          <a:prstGeom prst="ellipse">
+            <a:avLst/>
+          </a:prstGeom>
+          <a:solidFill>
+            <a:srgbClr val="15191A"/>
+          </a:solidFill>
+          <a:ln w="12700">
+            <a:solidFill>
+              <a:srgbClr val="262C2E"/>
+            </a:solidFill>
+            <a:prstDash val="solid"/>
+          </a:ln>
+        </p:spPr>
+      </p:sp>
+      <p:pic>
+        <p:nvPicPr>
+          <p:cNvPr id="22" name="Image 3" descr="preencoded.png">    </p:cNvPr>
+          <p:cNvPicPr>
+            <a:picLocks noChangeAspect="1"/>
+          </p:cNvPicPr>
+          <p:nvPr/>
+        </p:nvPicPr>
+        <p:blipFill>
+          <a:blip r:embed="rId4"/>
+          <a:stretch>
+            <a:fillRect/>
+          </a:stretch>
+        </p:blipFill>
+        <p:spPr>
+          <a:xfrm>
+            <a:off x="7613112" y="3032150"/>
+            <a:ext cx="382219" cy="382219"/>
+          </a:xfrm>
+          <a:prstGeom prst="rect">
+            <a:avLst/>
+          </a:prstGeom>
+        </p:spPr>
+      </p:pic>
+      <p:sp>
+        <p:nvSpPr>
+          <p:cNvPr id="23" name="Text 17"/>
+          <p:cNvSpPr txBox="1"/>
+          <p:nvPr/>
+        </p:nvSpPr>
+        <p:spPr>
+          <a:xfrm>
+            <a:off x="7369881" y="3977640"/>
+            <a:ext cx="1907987" cy="201168"/>
+          </a:xfrm>
+          <a:prstGeom prst="rect">
+            <a:avLst/>
+          </a:prstGeom>
+          <a:noFill/>
+          <a:ln/>
+        </p:spPr>
+        <p:txBody>
+          <a:bodyPr wrap="square" lIns="0" tIns="0" rIns="0" bIns="0" rtlCol="0" anchor="t"/>
+          <a:lstStyle/>
+          <a:p>
+            <a:pPr indent="0" marL="0">
+              <a:buNone/>
+            </a:pPr>
+            <a:r>
+              <a:rPr lang="en-US" sz="1000" b="1" spc="200" kern="0" dirty="0">
+                <a:solidFill>
+                  <a:srgbClr val="6B7773"/>
+                </a:solidFill>
+                <a:latin typeface="Plus Jakarta Sans" pitchFamily="34" charset="0"/>
+                <a:ea typeface="Plus Jakarta Sans" pitchFamily="34" charset="-122"/>
+                <a:cs typeface="Plus Jakarta Sans" pitchFamily="34" charset="-120"/>
+              </a:rPr>
+              <a:t>STEP 4</a:t>
+            </a:r>
+            <a:endParaRPr lang="en-US" sz="1000" dirty="0"/>
+          </a:p>
+        </p:txBody>
+      </p:sp>
+      <p:sp>
+        <p:nvSpPr>
+          <p:cNvPr id="24" name="Text 18"/>
+          <p:cNvSpPr txBox="1"/>
+          <p:nvPr/>
+        </p:nvSpPr>
+        <p:spPr>
+          <a:xfrm>
+            <a:off x="7369881" y="4251960"/>
+            <a:ext cx="1907987" cy="731520"/>
+          </a:xfrm>
+          <a:prstGeom prst="rect">
+            <a:avLst/>
+          </a:prstGeom>
+          <a:noFill/>
+          <a:ln/>
+        </p:spPr>
+        <p:txBody>
+          <a:bodyPr wrap="square" lIns="0" tIns="0" rIns="0" bIns="0" rtlCol="0" anchor="t"/>
+          <a:lstStyle/>
+          <a:p>
+            <a:pPr indent="0" marL="0">
+              <a:lnSpc>
+                <a:spcPct val="100000"/>
+              </a:lnSpc>
+              <a:buNone/>
+            </a:pPr>
+            <a:r>
+              <a:rPr lang="en-US" sz="2200" b="1" dirty="0">
+                <a:solidFill>
+                  <a:srgbClr val="F4F6F5"/>
+                </a:solidFill>
+                <a:latin typeface="Epilogue" pitchFamily="34" charset="0"/>
+                <a:ea typeface="Epilogue" pitchFamily="34" charset="-122"/>
+                <a:cs typeface="Epilogue" pitchFamily="34" charset="-120"/>
+              </a:rPr>
+              <a:t>Client nudged</a:t>
+            </a:r>
+            <a:endParaRPr lang="en-US" sz="2200" dirty="0"/>
+          </a:p>
+        </p:txBody>
+      </p:sp>
+      <p:sp>
+        <p:nvSpPr>
+          <p:cNvPr id="25" name="Text 19"/>
+          <p:cNvSpPr txBox="1"/>
+          <p:nvPr/>
+        </p:nvSpPr>
+        <p:spPr>
+          <a:xfrm>
+            <a:off x="7369881" y="5074920"/>
+            <a:ext cx="1907987" cy="640080"/>
+          </a:xfrm>
+          <a:prstGeom prst="rect">
+            <a:avLst/>
+          </a:prstGeom>
+          <a:noFill/>
+          <a:ln/>
+        </p:spPr>
+        <p:txBody>
+          <a:bodyPr wrap="square" lIns="0" tIns="0" rIns="0" bIns="0" rtlCol="0" anchor="t"/>
+          <a:lstStyle/>
+          <a:p>
+            <a:pPr indent="0" marL="0">
+              <a:lnSpc>
+                <a:spcPct val="125000"/>
+              </a:lnSpc>
+              <a:buNone/>
+            </a:pPr>
+            <a:r>
+              <a:rPr lang="en-US" sz="1500" dirty="0">
+                <a:solidFill>
+                  <a:srgbClr val="9AA7A2"/>
+                </a:solidFill>
+                <a:latin typeface="Manrope" pitchFamily="34" charset="0"/>
+                <a:ea typeface="Manrope" pitchFamily="34" charset="-122"/>
+                <a:cs typeface="Manrope" pitchFamily="34" charset="-120"/>
+              </a:rPr>
+              <a:t>Quiet for two days? It follows up.</a:t>
+            </a:r>
+            <a:endParaRPr lang="en-US" sz="1500" dirty="0"/>
+          </a:p>
+        </p:txBody>
+      </p:sp>
+      <p:sp>
+        <p:nvSpPr>
+          <p:cNvPr id="26" name="Shape 20"/>
+          <p:cNvSpPr/>
+          <p:nvPr/>
+        </p:nvSpPr>
+        <p:spPr>
+          <a:xfrm>
+            <a:off x="9597908" y="2788920"/>
+            <a:ext cx="868680" cy="868680"/>
+          </a:xfrm>
+          <a:prstGeom prst="ellipse">
+            <a:avLst/>
+          </a:prstGeom>
+          <a:solidFill>
+            <a:srgbClr val="B8E62E"/>
+          </a:solidFill>
+          <a:ln w="12700">
+            <a:solidFill>
+              <a:srgbClr val="B8E62E"/>
+            </a:solidFill>
+            <a:prstDash val="solid"/>
+          </a:ln>
+        </p:spPr>
+      </p:sp>
+      <p:pic>
+        <p:nvPicPr>
+          <p:cNvPr id="27" name="Image 4" descr="preencoded.png">    </p:cNvPr>
+          <p:cNvPicPr>
+            <a:picLocks noChangeAspect="1"/>
+          </p:cNvPicPr>
+          <p:nvPr/>
+        </p:nvPicPr>
+        <p:blipFill>
+          <a:blip r:embed="rId5"/>
+          <a:stretch>
+            <a:fillRect/>
+          </a:stretch>
+        </p:blipFill>
+        <p:spPr>
+          <a:xfrm>
+            <a:off x="9841139" y="3032150"/>
+            <a:ext cx="382219" cy="382219"/>
+          </a:xfrm>
+          <a:prstGeom prst="rect">
+            <a:avLst/>
+          </a:prstGeom>
+        </p:spPr>
+      </p:pic>
+      <p:sp>
+        <p:nvSpPr>
+          <p:cNvPr id="28" name="Text 21"/>
+          <p:cNvSpPr txBox="1"/>
+          <p:nvPr/>
+        </p:nvSpPr>
+        <p:spPr>
+          <a:xfrm>
+            <a:off x="9597908" y="3977640"/>
+            <a:ext cx="1907987" cy="201168"/>
+          </a:xfrm>
+          <a:prstGeom prst="rect">
+            <a:avLst/>
+          </a:prstGeom>
+          <a:noFill/>
+          <a:ln/>
+        </p:spPr>
+        <p:txBody>
+          <a:bodyPr wrap="square" lIns="0" tIns="0" rIns="0" bIns="0" rtlCol="0" anchor="t"/>
+          <a:lstStyle/>
+          <a:p>
+            <a:pPr indent="0" marL="0">
+              <a:buNone/>
+            </a:pPr>
+            <a:r>
+              <a:rPr lang="en-US" sz="1000" b="1" spc="200" kern="0" dirty="0">
+                <a:solidFill>
+                  <a:srgbClr val="6B7773"/>
+                </a:solidFill>
+                <a:latin typeface="Plus Jakarta Sans" pitchFamily="34" charset="0"/>
+                <a:ea typeface="Plus Jakarta Sans" pitchFamily="34" charset="-122"/>
+                <a:cs typeface="Plus Jakarta Sans" pitchFamily="34" charset="-120"/>
+              </a:rPr>
+              <a:t>STEP 5</a:t>
+            </a:r>
+            <a:endParaRPr lang="en-US" sz="1000" dirty="0"/>
+          </a:p>
+        </p:txBody>
+      </p:sp>
+      <p:sp>
+        <p:nvSpPr>
+          <p:cNvPr id="29" name="Text 22"/>
+          <p:cNvSpPr txBox="1"/>
+          <p:nvPr/>
+        </p:nvSpPr>
+        <p:spPr>
+          <a:xfrm>
+            <a:off x="9597908" y="4251960"/>
+            <a:ext cx="1907987" cy="731520"/>
+          </a:xfrm>
+          <a:prstGeom prst="rect">
+            <a:avLst/>
+          </a:prstGeom>
+          <a:noFill/>
+          <a:ln/>
+        </p:spPr>
+        <p:txBody>
+          <a:bodyPr wrap="square" lIns="0" tIns="0" rIns="0" bIns="0" rtlCol="0" anchor="t"/>
+          <a:lstStyle/>
+          <a:p>
+            <a:pPr indent="0" marL="0">
+              <a:lnSpc>
+                <a:spcPct val="100000"/>
+              </a:lnSpc>
+              <a:buNone/>
+            </a:pPr>
+            <a:r>
+              <a:rPr lang="en-US" sz="2200" b="1" dirty="0">
+                <a:solidFill>
+                  <a:srgbClr val="F4F6F5"/>
+                </a:solidFill>
+                <a:latin typeface="Epilogue" pitchFamily="34" charset="0"/>
+                <a:ea typeface="Epilogue" pitchFamily="34" charset="-122"/>
+                <a:cs typeface="Epilogue" pitchFamily="34" charset="-120"/>
+              </a:rPr>
+              <a:t>Billed</a:t>
+            </a:r>
+            <a:endParaRPr lang="en-US" sz="2200" dirty="0"/>
+          </a:p>
+        </p:txBody>
+      </p:sp>
+      <p:sp>
+        <p:nvSpPr>
+          <p:cNvPr id="30" name="Text 23"/>
+          <p:cNvSpPr txBox="1"/>
+          <p:nvPr/>
+        </p:nvSpPr>
+        <p:spPr>
+          <a:xfrm>
+            <a:off x="9597908" y="5074920"/>
+            <a:ext cx="1907987" cy="640080"/>
+          </a:xfrm>
+          <a:prstGeom prst="rect">
+            <a:avLst/>
+          </a:prstGeom>
+          <a:noFill/>
+          <a:ln/>
+        </p:spPr>
+        <p:txBody>
+          <a:bodyPr wrap="square" lIns="0" tIns="0" rIns="0" bIns="0" rtlCol="0" anchor="t"/>
+          <a:lstStyle/>
+          <a:p>
+            <a:pPr indent="0" marL="0">
+              <a:lnSpc>
+                <a:spcPct val="125000"/>
+              </a:lnSpc>
+              <a:buNone/>
+            </a:pPr>
+            <a:r>
+              <a:rPr lang="en-US" sz="1500" dirty="0">
+                <a:solidFill>
+                  <a:srgbClr val="9AA7A2"/>
+                </a:solidFill>
+                <a:latin typeface="Manrope" pitchFamily="34" charset="0"/>
+                <a:ea typeface="Manrope" pitchFamily="34" charset="-122"/>
+                <a:cs typeface="Manrope" pitchFamily="34" charset="-120"/>
+              </a:rPr>
+              <a:t>Done work goes straight to billing.</a:t>
+            </a:r>
+            <a:endParaRPr lang="en-US" sz="1500" dirty="0"/>
+          </a:p>
+        </p:txBody>
+      </p:sp>
+      <p:pic>
+        <p:nvPicPr>
+          <p:cNvPr id="31" name="Image 5" descr="/tmp/claude-0/-home-user-Claude-Works/c609e3f7-e17f-5f43-8424-4df30cb9a6a9/scratchpad/build/s/img/annan_proud.png">    </p:cNvPr>
+          <p:cNvPicPr>
+            <a:picLocks noChangeAspect="1"/>
+          </p:cNvPicPr>
+          <p:nvPr/>
+        </p:nvPicPr>
+        <p:blipFill>
+          <a:blip r:embed="rId6"/>
+          <a:stretch>
+            <a:fillRect/>
+          </a:stretch>
+        </p:blipFill>
+        <p:spPr>
+          <a:xfrm>
+            <a:off x="10062670" y="594360"/>
+            <a:ext cx="1443225" cy="1737360"/>
+          </a:xfrm>
+          <a:prstGeom prst="rect">
+            <a:avLst/>
+          </a:prstGeom>
+        </p:spPr>
+      </p:pic>
+      <p:sp>
+        <p:nvSpPr>
+          <p:cNvPr id="32" name="Shape 24"/>
+          <p:cNvSpPr/>
+          <p:nvPr/>
+        </p:nvSpPr>
+        <p:spPr>
+          <a:xfrm>
+            <a:off x="7273750" y="1005840"/>
+            <a:ext cx="2514600" cy="731520"/>
           </a:xfrm>
           <a:prstGeom prst="roundRect">
             <a:avLst>
-              <a:gd name="adj" fmla="val 25882"/>
+              <a:gd name="adj" fmla="val 25000"/>
             </a:avLst>
           </a:prstGeom>
           <a:solidFill>
             <a:srgbClr val="F4F6F5"/>
           </a:solidFill>
           <a:ln/>
-          <a:effectLst>
-            <a:outerShdw sx="100000" sy="100000" kx="0" ky="0" algn="bl" rotWithShape="0" blurRad="127000" dist="38100" dir="5400000">
-              <a:srgbClr val="000000">
-                <a:alpha val="35000"/>
-              </a:srgbClr>
-            </a:outerShdw>
-          </a:effectLst>
-        </p:spPr>
-      </p:sp>
-      <p:sp>
-        <p:nvSpPr>
-          <p:cNvPr id="7" name="Shape 4"/>
+        </p:spPr>
+      </p:sp>
+      <p:sp>
+        <p:nvSpPr>
+          <p:cNvPr id="33" name="Shape 25"/>
           <p:cNvSpPr/>
           <p:nvPr/>
         </p:nvSpPr>
         <p:spPr>
           <a:xfrm rot="5400000">
-            <a:off x="10021824" y="955548"/>
-            <a:ext cx="237744" cy="237744"/>
+            <a:off x="9779206" y="1261872"/>
+            <a:ext cx="219456" cy="175565"/>
           </a:xfrm>
           <a:prstGeom prst="triangle">
             <a:avLst/>
@@ -2096,14 +3003,14 @@
       </p:sp>
       <p:sp>
         <p:nvSpPr>
-          <p:cNvPr id="8" name="Text 5"/>
+          <p:cNvPr id="34" name="Text 26"/>
           <p:cNvSpPr txBox="1"/>
           <p:nvPr/>
         </p:nvSpPr>
         <p:spPr>
           <a:xfrm>
-            <a:off x="7406640" y="685800"/>
-            <a:ext cx="2423160" cy="777240"/>
+            <a:off x="7502350" y="1005840"/>
+            <a:ext cx="2057400" cy="731520"/>
           </a:xfrm>
           <a:prstGeom prst="rect">
             <a:avLst/>
@@ -2122,7 +3029,7 @@
               <a:buNone/>
             </a:pPr>
             <a:r>
-              <a:rPr lang="en-US" sz="1350" b="1" dirty="0">
+              <a:rPr lang="en-US" sz="1500" b="1" dirty="0">
                 <a:solidFill>
                   <a:srgbClr val="0B0D0C"/>
                 </a:solidFill>
@@ -2132,176 +3039,20 @@
               </a:rPr>
               <a:t>Every job, same path. I watch every step.</a:t>
             </a:r>
-            <a:endParaRPr lang="en-US" sz="1350" dirty="0"/>
-          </a:p>
-        </p:txBody>
-      </p:sp>
-      <p:sp>
-        <p:nvSpPr>
-          <p:cNvPr id="9" name="Shape 6"/>
-          <p:cNvSpPr/>
-          <p:nvPr/>
-        </p:nvSpPr>
-        <p:spPr>
-          <a:xfrm>
-            <a:off x="1412215" y="2514600"/>
-            <a:ext cx="9367266" cy="0"/>
-          </a:xfrm>
-          <a:prstGeom prst="line">
-            <a:avLst/>
-          </a:prstGeom>
-          <a:noFill/>
-          <a:ln w="22225">
-            <a:solidFill>
-              <a:srgbClr val="B8E62E"/>
-            </a:solidFill>
-            <a:prstDash val="dash"/>
-          </a:ln>
-        </p:spPr>
-      </p:sp>
-      <p:sp>
-        <p:nvSpPr>
-          <p:cNvPr id="10" name="Shape 7"/>
-          <p:cNvSpPr/>
-          <p:nvPr/>
-        </p:nvSpPr>
-        <p:spPr>
-          <a:xfrm>
-            <a:off x="1183615" y="2286000"/>
-            <a:ext cx="457200" cy="457200"/>
-          </a:xfrm>
-          <a:prstGeom prst="ellipse">
-            <a:avLst/>
-          </a:prstGeom>
-          <a:solidFill>
-            <a:srgbClr val="0B0D0C"/>
-          </a:solidFill>
-          <a:ln w="22225">
-            <a:solidFill>
-              <a:srgbClr val="B8E62E"/>
-            </a:solidFill>
-            <a:prstDash val="solid"/>
-          </a:ln>
-        </p:spPr>
-      </p:sp>
-      <p:sp>
-        <p:nvSpPr>
-          <p:cNvPr id="11" name="Text 8"/>
+            <a:endParaRPr lang="en-US" sz="1500" dirty="0"/>
+          </a:p>
+        </p:txBody>
+      </p:sp>
+      <p:sp>
+        <p:nvSpPr>
+          <p:cNvPr id="35" name="Text 27"/>
           <p:cNvSpPr txBox="1"/>
           <p:nvPr/>
         </p:nvSpPr>
         <p:spPr>
           <a:xfrm>
-            <a:off x="1183615" y="2286000"/>
-            <a:ext cx="457200" cy="457200"/>
-          </a:xfrm>
-          <a:prstGeom prst="rect">
-            <a:avLst/>
-          </a:prstGeom>
-          <a:noFill/>
-          <a:ln/>
-        </p:spPr>
-        <p:txBody>
-          <a:bodyPr wrap="square" lIns="0" tIns="0" rIns="0" bIns="0" rtlCol="0" anchor="ctr"/>
-          <a:lstStyle/>
-          <a:p>
-            <a:pPr algn="ctr" indent="0" marL="0">
-              <a:buNone/>
-            </a:pPr>
-            <a:r>
-              <a:rPr lang="en-US" sz="1400" b="1" dirty="0">
-                <a:solidFill>
-                  <a:srgbClr val="B8E62E"/>
-                </a:solidFill>
-                <a:latin typeface="Epilogue" pitchFamily="34" charset="0"/>
-                <a:ea typeface="Epilogue" pitchFamily="34" charset="-122"/>
-                <a:cs typeface="Epilogue" pitchFamily="34" charset="-120"/>
-              </a:rPr>
-              <a:t>1</a:t>
-            </a:r>
-            <a:endParaRPr lang="en-US" sz="1400" dirty="0"/>
-          </a:p>
-        </p:txBody>
-      </p:sp>
-      <p:sp>
-        <p:nvSpPr>
-          <p:cNvPr id="12" name="Shape 9"/>
-          <p:cNvSpPr/>
-          <p:nvPr/>
-        </p:nvSpPr>
-        <p:spPr>
-          <a:xfrm>
-            <a:off x="548640" y="3017520"/>
-            <a:ext cx="1727149" cy="3246120"/>
-          </a:xfrm>
-          <a:prstGeom prst="roundRect">
-            <a:avLst>
-              <a:gd name="adj" fmla="val 8471"/>
-            </a:avLst>
-          </a:prstGeom>
-          <a:solidFill>
-            <a:srgbClr val="15191A"/>
-          </a:solidFill>
-          <a:ln w="9525">
-            <a:solidFill>
-              <a:srgbClr val="262C2E"/>
-            </a:solidFill>
-            <a:prstDash val="solid"/>
-          </a:ln>
-        </p:spPr>
-      </p:sp>
-      <p:sp>
-        <p:nvSpPr>
-          <p:cNvPr id="13" name="Text 10"/>
-          <p:cNvSpPr txBox="1"/>
-          <p:nvPr/>
-        </p:nvSpPr>
-        <p:spPr>
-          <a:xfrm>
-            <a:off x="731520" y="3200400"/>
-            <a:ext cx="1407109" cy="566928"/>
-          </a:xfrm>
-          <a:prstGeom prst="rect">
-            <a:avLst/>
-          </a:prstGeom>
-          <a:noFill/>
-          <a:ln/>
-        </p:spPr>
-        <p:txBody>
-          <a:bodyPr wrap="square" lIns="0" tIns="0" rIns="0" bIns="0" rtlCol="0" anchor="t"/>
-          <a:lstStyle/>
-          <a:p>
-            <a:pPr indent="0" marL="0">
-              <a:lnSpc>
-                <a:spcPct val="105000"/>
-              </a:lnSpc>
-              <a:buNone/>
-            </a:pPr>
-            <a:r>
-              <a:rPr lang="en-US" sz="1450" b="1" dirty="0">
-                <a:solidFill>
-                  <a:srgbClr val="F4F6F5"/>
-                </a:solidFill>
-                <a:latin typeface="Epilogue" pitchFamily="34" charset="0"/>
-                <a:ea typeface="Epilogue" pitchFamily="34" charset="-122"/>
-                <a:cs typeface="Epilogue" pitchFamily="34" charset="-120"/>
-              </a:rPr>
-              <a:t>A brief comes in</a:t>
-            </a:r>
-            <a:endParaRPr lang="en-US" sz="1450" dirty="0"/>
-          </a:p>
-        </p:txBody>
-      </p:sp>
-      <p:sp>
-        <p:nvSpPr>
-          <p:cNvPr id="14" name="Text 11"/>
-          <p:cNvSpPr txBox="1"/>
-          <p:nvPr/>
-        </p:nvSpPr>
-        <p:spPr>
-          <a:xfrm>
-            <a:off x="731520" y="3886200"/>
-            <a:ext cx="1452829" cy="182880"/>
+            <a:off x="685800" y="6355080"/>
+            <a:ext cx="6400800" cy="201168"/>
           </a:xfrm>
           <a:prstGeom prst="rect">
             <a:avLst/>
@@ -2317,1782 +3068,7 @@
               <a:buNone/>
             </a:pPr>
             <a:r>
-              <a:rPr lang="en-US" sz="750" b="1" spc="150" kern="0" dirty="0">
-                <a:solidFill>
-                  <a:srgbClr val="FF5C7A"/>
-                </a:solidFill>
-                <a:latin typeface="Plus Jakarta Sans" pitchFamily="34" charset="0"/>
-                <a:ea typeface="Plus Jakarta Sans" pitchFamily="34" charset="-122"/>
-                <a:cs typeface="Plus Jakarta Sans" pitchFamily="34" charset="-120"/>
-              </a:rPr>
-              <a:t>USUALLY</a:t>
-            </a:r>
-            <a:endParaRPr lang="en-US" sz="750" dirty="0"/>
-          </a:p>
-        </p:txBody>
-      </p:sp>
-      <p:sp>
-        <p:nvSpPr>
-          <p:cNvPr id="15" name="Text 12"/>
-          <p:cNvSpPr txBox="1"/>
-          <p:nvPr/>
-        </p:nvSpPr>
-        <p:spPr>
-          <a:xfrm>
-            <a:off x="731520" y="4096512"/>
-            <a:ext cx="1407109" cy="658368"/>
-          </a:xfrm>
-          <a:prstGeom prst="rect">
-            <a:avLst/>
-          </a:prstGeom>
-          <a:noFill/>
-          <a:ln/>
-        </p:spPr>
-        <p:txBody>
-          <a:bodyPr wrap="square" lIns="0" tIns="0" rIns="0" bIns="0" rtlCol="0" anchor="t"/>
-          <a:lstStyle/>
-          <a:p>
-            <a:pPr indent="0" marL="0">
-              <a:lnSpc>
-                <a:spcPct val="112000"/>
-              </a:lnSpc>
-              <a:buNone/>
-            </a:pPr>
-            <a:r>
-              <a:rPr lang="en-US" sz="1100" dirty="0">
-                <a:solidFill>
-                  <a:srgbClr val="9AA7A2"/>
-                </a:solidFill>
-                <a:latin typeface="Manrope" pitchFamily="34" charset="0"/>
-                <a:ea typeface="Manrope" pitchFamily="34" charset="-122"/>
-                <a:cs typeface="Manrope" pitchFamily="34" charset="-120"/>
-              </a:rPr>
-              <a:t>It arrives on WhatsApp at 11 pm.</a:t>
-            </a:r>
-            <a:endParaRPr lang="en-US" sz="1100" dirty="0"/>
-          </a:p>
-        </p:txBody>
-      </p:sp>
-      <p:sp>
-        <p:nvSpPr>
-          <p:cNvPr id="16" name="Shape 13"/>
-          <p:cNvSpPr/>
-          <p:nvPr/>
-        </p:nvSpPr>
-        <p:spPr>
-          <a:xfrm>
-            <a:off x="731520" y="4828032"/>
-            <a:ext cx="1361389" cy="0"/>
-          </a:xfrm>
-          <a:prstGeom prst="line">
-            <a:avLst/>
-          </a:prstGeom>
-          <a:noFill/>
-          <a:ln w="9525">
-            <a:solidFill>
-              <a:srgbClr val="262C2E"/>
-            </a:solidFill>
-            <a:prstDash val="solid"/>
-          </a:ln>
-        </p:spPr>
-      </p:sp>
-      <p:sp>
-        <p:nvSpPr>
-          <p:cNvPr id="17" name="Text 14"/>
-          <p:cNvSpPr txBox="1"/>
-          <p:nvPr/>
-        </p:nvSpPr>
-        <p:spPr>
-          <a:xfrm>
-            <a:off x="731520" y="4937760"/>
-            <a:ext cx="1452829" cy="182880"/>
-          </a:xfrm>
-          <a:prstGeom prst="rect">
-            <a:avLst/>
-          </a:prstGeom>
-          <a:noFill/>
-          <a:ln/>
-        </p:spPr>
-        <p:txBody>
-          <a:bodyPr wrap="square" lIns="0" tIns="0" rIns="0" bIns="0" rtlCol="0" anchor="t"/>
-          <a:lstStyle/>
-          <a:p>
-            <a:pPr indent="0" marL="0">
-              <a:buNone/>
-            </a:pPr>
-            <a:r>
-              <a:rPr lang="en-US" sz="750" b="1" spc="150" kern="0" dirty="0">
-                <a:solidFill>
-                  <a:srgbClr val="B8E62E"/>
-                </a:solidFill>
-                <a:latin typeface="Plus Jakarta Sans" pitchFamily="34" charset="0"/>
-                <a:ea typeface="Plus Jakarta Sans" pitchFamily="34" charset="-122"/>
-                <a:cs typeface="Plus Jakarta Sans" pitchFamily="34" charset="-120"/>
-              </a:rPr>
-              <a:t>WITH BOD APP</a:t>
-            </a:r>
-            <a:endParaRPr lang="en-US" sz="750" dirty="0"/>
-          </a:p>
-        </p:txBody>
-      </p:sp>
-      <p:sp>
-        <p:nvSpPr>
-          <p:cNvPr id="18" name="Text 15"/>
-          <p:cNvSpPr txBox="1"/>
-          <p:nvPr/>
-        </p:nvSpPr>
-        <p:spPr>
-          <a:xfrm>
-            <a:off x="731520" y="5148072"/>
-            <a:ext cx="1407109" cy="1005840"/>
-          </a:xfrm>
-          <a:prstGeom prst="rect">
-            <a:avLst/>
-          </a:prstGeom>
-          <a:noFill/>
-          <a:ln/>
-        </p:spPr>
-        <p:txBody>
-          <a:bodyPr wrap="square" lIns="0" tIns="0" rIns="0" bIns="0" rtlCol="0" anchor="t"/>
-          <a:lstStyle/>
-          <a:p>
-            <a:pPr indent="0" marL="0">
-              <a:lnSpc>
-                <a:spcPct val="112000"/>
-              </a:lnSpc>
-              <a:buNone/>
-            </a:pPr>
-            <a:r>
-              <a:rPr lang="en-US" sz="1150" b="1" dirty="0">
-                <a:solidFill>
-                  <a:srgbClr val="F4F6F5"/>
-                </a:solidFill>
-                <a:latin typeface="Manrope" pitchFamily="34" charset="0"/>
-                <a:ea typeface="Manrope" pitchFamily="34" charset="-122"/>
-                <a:cs typeface="Manrope" pitchFamily="34" charset="-120"/>
-              </a:rPr>
-              <a:t>Say it, type it or drop the PDF. It becomes a task.</a:t>
-            </a:r>
-            <a:endParaRPr lang="en-US" sz="1150" dirty="0"/>
-          </a:p>
-        </p:txBody>
-      </p:sp>
-      <p:sp>
-        <p:nvSpPr>
-          <p:cNvPr id="19" name="Shape 16"/>
-          <p:cNvSpPr/>
-          <p:nvPr/>
-        </p:nvSpPr>
-        <p:spPr>
-          <a:xfrm>
-            <a:off x="3057068" y="2286000"/>
-            <a:ext cx="457200" cy="457200"/>
-          </a:xfrm>
-          <a:prstGeom prst="ellipse">
-            <a:avLst/>
-          </a:prstGeom>
-          <a:solidFill>
-            <a:srgbClr val="0B0D0C"/>
-          </a:solidFill>
-          <a:ln w="22225">
-            <a:solidFill>
-              <a:srgbClr val="B8E62E"/>
-            </a:solidFill>
-            <a:prstDash val="solid"/>
-          </a:ln>
-        </p:spPr>
-      </p:sp>
-      <p:sp>
-        <p:nvSpPr>
-          <p:cNvPr id="20" name="Text 17"/>
-          <p:cNvSpPr txBox="1"/>
-          <p:nvPr/>
-        </p:nvSpPr>
-        <p:spPr>
-          <a:xfrm>
-            <a:off x="3057068" y="2286000"/>
-            <a:ext cx="457200" cy="457200"/>
-          </a:xfrm>
-          <a:prstGeom prst="rect">
-            <a:avLst/>
-          </a:prstGeom>
-          <a:noFill/>
-          <a:ln/>
-        </p:spPr>
-        <p:txBody>
-          <a:bodyPr wrap="square" lIns="0" tIns="0" rIns="0" bIns="0" rtlCol="0" anchor="ctr"/>
-          <a:lstStyle/>
-          <a:p>
-            <a:pPr algn="ctr" indent="0" marL="0">
-              <a:buNone/>
-            </a:pPr>
-            <a:r>
-              <a:rPr lang="en-US" sz="1400" b="1" dirty="0">
-                <a:solidFill>
-                  <a:srgbClr val="B8E62E"/>
-                </a:solidFill>
-                <a:latin typeface="Epilogue" pitchFamily="34" charset="0"/>
-                <a:ea typeface="Epilogue" pitchFamily="34" charset="-122"/>
-                <a:cs typeface="Epilogue" pitchFamily="34" charset="-120"/>
-              </a:rPr>
-              <a:t>2</a:t>
-            </a:r>
-            <a:endParaRPr lang="en-US" sz="1400" dirty="0"/>
-          </a:p>
-        </p:txBody>
-      </p:sp>
-      <p:sp>
-        <p:nvSpPr>
-          <p:cNvPr id="21" name="Shape 18"/>
-          <p:cNvSpPr/>
-          <p:nvPr/>
-        </p:nvSpPr>
-        <p:spPr>
-          <a:xfrm>
-            <a:off x="2422093" y="3017520"/>
-            <a:ext cx="1727149" cy="3246120"/>
-          </a:xfrm>
-          <a:prstGeom prst="roundRect">
-            <a:avLst>
-              <a:gd name="adj" fmla="val 8471"/>
-            </a:avLst>
-          </a:prstGeom>
-          <a:solidFill>
-            <a:srgbClr val="15191A"/>
-          </a:solidFill>
-          <a:ln w="9525">
-            <a:solidFill>
-              <a:srgbClr val="262C2E"/>
-            </a:solidFill>
-            <a:prstDash val="solid"/>
-          </a:ln>
-        </p:spPr>
-      </p:sp>
-      <p:sp>
-        <p:nvSpPr>
-          <p:cNvPr id="22" name="Text 19"/>
-          <p:cNvSpPr txBox="1"/>
-          <p:nvPr/>
-        </p:nvSpPr>
-        <p:spPr>
-          <a:xfrm>
-            <a:off x="2604973" y="3200400"/>
-            <a:ext cx="1407109" cy="566928"/>
-          </a:xfrm>
-          <a:prstGeom prst="rect">
-            <a:avLst/>
-          </a:prstGeom>
-          <a:noFill/>
-          <a:ln/>
-        </p:spPr>
-        <p:txBody>
-          <a:bodyPr wrap="square" lIns="0" tIns="0" rIns="0" bIns="0" rtlCol="0" anchor="t"/>
-          <a:lstStyle/>
-          <a:p>
-            <a:pPr indent="0" marL="0">
-              <a:lnSpc>
-                <a:spcPct val="105000"/>
-              </a:lnSpc>
-              <a:buNone/>
-            </a:pPr>
-            <a:r>
-              <a:rPr lang="en-US" sz="1450" b="1" dirty="0">
-                <a:solidFill>
-                  <a:srgbClr val="F4F6F5"/>
-                </a:solidFill>
-                <a:latin typeface="Epilogue" pitchFamily="34" charset="0"/>
-                <a:ea typeface="Epilogue" pitchFamily="34" charset="-122"/>
-                <a:cs typeface="Epilogue" pitchFamily="34" charset="-120"/>
-              </a:rPr>
-              <a:t>Someone picks it up</a:t>
-            </a:r>
-            <a:endParaRPr lang="en-US" sz="1450" dirty="0"/>
-          </a:p>
-        </p:txBody>
-      </p:sp>
-      <p:sp>
-        <p:nvSpPr>
-          <p:cNvPr id="23" name="Text 20"/>
-          <p:cNvSpPr txBox="1"/>
-          <p:nvPr/>
-        </p:nvSpPr>
-        <p:spPr>
-          <a:xfrm>
-            <a:off x="2604973" y="3886200"/>
-            <a:ext cx="1452829" cy="182880"/>
-          </a:xfrm>
-          <a:prstGeom prst="rect">
-            <a:avLst/>
-          </a:prstGeom>
-          <a:noFill/>
-          <a:ln/>
-        </p:spPr>
-        <p:txBody>
-          <a:bodyPr wrap="square" lIns="0" tIns="0" rIns="0" bIns="0" rtlCol="0" anchor="t"/>
-          <a:lstStyle/>
-          <a:p>
-            <a:pPr indent="0" marL="0">
-              <a:buNone/>
-            </a:pPr>
-            <a:r>
-              <a:rPr lang="en-US" sz="750" b="1" spc="150" kern="0" dirty="0">
-                <a:solidFill>
-                  <a:srgbClr val="FF5C7A"/>
-                </a:solidFill>
-                <a:latin typeface="Plus Jakarta Sans" pitchFamily="34" charset="0"/>
-                <a:ea typeface="Plus Jakarta Sans" pitchFamily="34" charset="-122"/>
-                <a:cs typeface="Plus Jakarta Sans" pitchFamily="34" charset="-120"/>
-              </a:rPr>
-              <a:t>USUALLY</a:t>
-            </a:r>
-            <a:endParaRPr lang="en-US" sz="750" dirty="0"/>
-          </a:p>
-        </p:txBody>
-      </p:sp>
-      <p:sp>
-        <p:nvSpPr>
-          <p:cNvPr id="24" name="Text 21"/>
-          <p:cNvSpPr txBox="1"/>
-          <p:nvPr/>
-        </p:nvSpPr>
-        <p:spPr>
-          <a:xfrm>
-            <a:off x="2604973" y="4096512"/>
-            <a:ext cx="1407109" cy="658368"/>
-          </a:xfrm>
-          <a:prstGeom prst="rect">
-            <a:avLst/>
-          </a:prstGeom>
-          <a:noFill/>
-          <a:ln/>
-        </p:spPr>
-        <p:txBody>
-          <a:bodyPr wrap="square" lIns="0" tIns="0" rIns="0" bIns="0" rtlCol="0" anchor="t"/>
-          <a:lstStyle/>
-          <a:p>
-            <a:pPr indent="0" marL="0">
-              <a:lnSpc>
-                <a:spcPct val="112000"/>
-              </a:lnSpc>
-              <a:buNone/>
-            </a:pPr>
-            <a:r>
-              <a:rPr lang="en-US" sz="1100" dirty="0">
-                <a:solidFill>
-                  <a:srgbClr val="9AA7A2"/>
-                </a:solidFill>
-                <a:latin typeface="Manrope" pitchFamily="34" charset="0"/>
-                <a:ea typeface="Manrope" pitchFamily="34" charset="-122"/>
-                <a:cs typeface="Manrope" pitchFamily="34" charset="-120"/>
-              </a:rPr>
-              <a:t>“Who's doing this?”</a:t>
-            </a:r>
-            <a:endParaRPr lang="en-US" sz="1100" dirty="0"/>
-          </a:p>
-        </p:txBody>
-      </p:sp>
-      <p:sp>
-        <p:nvSpPr>
-          <p:cNvPr id="25" name="Shape 22"/>
-          <p:cNvSpPr/>
-          <p:nvPr/>
-        </p:nvSpPr>
-        <p:spPr>
-          <a:xfrm>
-            <a:off x="2604973" y="4828032"/>
-            <a:ext cx="1361389" cy="0"/>
-          </a:xfrm>
-          <a:prstGeom prst="line">
-            <a:avLst/>
-          </a:prstGeom>
-          <a:noFill/>
-          <a:ln w="9525">
-            <a:solidFill>
-              <a:srgbClr val="262C2E"/>
-            </a:solidFill>
-            <a:prstDash val="solid"/>
-          </a:ln>
-        </p:spPr>
-      </p:sp>
-      <p:sp>
-        <p:nvSpPr>
-          <p:cNvPr id="26" name="Text 23"/>
-          <p:cNvSpPr txBox="1"/>
-          <p:nvPr/>
-        </p:nvSpPr>
-        <p:spPr>
-          <a:xfrm>
-            <a:off x="2604973" y="4937760"/>
-            <a:ext cx="1452829" cy="182880"/>
-          </a:xfrm>
-          <a:prstGeom prst="rect">
-            <a:avLst/>
-          </a:prstGeom>
-          <a:noFill/>
-          <a:ln/>
-        </p:spPr>
-        <p:txBody>
-          <a:bodyPr wrap="square" lIns="0" tIns="0" rIns="0" bIns="0" rtlCol="0" anchor="t"/>
-          <a:lstStyle/>
-          <a:p>
-            <a:pPr indent="0" marL="0">
-              <a:buNone/>
-            </a:pPr>
-            <a:r>
-              <a:rPr lang="en-US" sz="750" b="1" spc="150" kern="0" dirty="0">
-                <a:solidFill>
-                  <a:srgbClr val="B8E62E"/>
-                </a:solidFill>
-                <a:latin typeface="Plus Jakarta Sans" pitchFamily="34" charset="0"/>
-                <a:ea typeface="Plus Jakarta Sans" pitchFamily="34" charset="-122"/>
-                <a:cs typeface="Plus Jakarta Sans" pitchFamily="34" charset="-120"/>
-              </a:rPr>
-              <a:t>WITH BOD APP</a:t>
-            </a:r>
-            <a:endParaRPr lang="en-US" sz="750" dirty="0"/>
-          </a:p>
-        </p:txBody>
-      </p:sp>
-      <p:sp>
-        <p:nvSpPr>
-          <p:cNvPr id="27" name="Text 24"/>
-          <p:cNvSpPr txBox="1"/>
-          <p:nvPr/>
-        </p:nvSpPr>
-        <p:spPr>
-          <a:xfrm>
-            <a:off x="2604973" y="5148072"/>
-            <a:ext cx="1407109" cy="1005840"/>
-          </a:xfrm>
-          <a:prstGeom prst="rect">
-            <a:avLst/>
-          </a:prstGeom>
-          <a:noFill/>
-          <a:ln/>
-        </p:spPr>
-        <p:txBody>
-          <a:bodyPr wrap="square" lIns="0" tIns="0" rIns="0" bIns="0" rtlCol="0" anchor="t"/>
-          <a:lstStyle/>
-          <a:p>
-            <a:pPr indent="0" marL="0">
-              <a:lnSpc>
-                <a:spcPct val="112000"/>
-              </a:lnSpc>
-              <a:buNone/>
-            </a:pPr>
-            <a:r>
-              <a:rPr lang="en-US" sz="1150" b="1" dirty="0">
-                <a:solidFill>
-                  <a:srgbClr val="F4F6F5"/>
-                </a:solidFill>
-                <a:latin typeface="Manrope" pitchFamily="34" charset="0"/>
-                <a:ea typeface="Manrope" pitchFamily="34" charset="-122"/>
-                <a:cs typeface="Manrope" pitchFamily="34" charset="-120"/>
-              </a:rPr>
-              <a:t>The PM approves it, and it goes to the right person.</a:t>
-            </a:r>
-            <a:endParaRPr lang="en-US" sz="1150" dirty="0"/>
-          </a:p>
-        </p:txBody>
-      </p:sp>
-      <p:sp>
-        <p:nvSpPr>
-          <p:cNvPr id="28" name="Shape 25"/>
-          <p:cNvSpPr/>
-          <p:nvPr/>
-        </p:nvSpPr>
-        <p:spPr>
-          <a:xfrm>
-            <a:off x="4930521" y="2286000"/>
-            <a:ext cx="457200" cy="457200"/>
-          </a:xfrm>
-          <a:prstGeom prst="ellipse">
-            <a:avLst/>
-          </a:prstGeom>
-          <a:solidFill>
-            <a:srgbClr val="0B0D0C"/>
-          </a:solidFill>
-          <a:ln w="22225">
-            <a:solidFill>
-              <a:srgbClr val="B8E62E"/>
-            </a:solidFill>
-            <a:prstDash val="solid"/>
-          </a:ln>
-        </p:spPr>
-      </p:sp>
-      <p:sp>
-        <p:nvSpPr>
-          <p:cNvPr id="29" name="Text 26"/>
-          <p:cNvSpPr txBox="1"/>
-          <p:nvPr/>
-        </p:nvSpPr>
-        <p:spPr>
-          <a:xfrm>
-            <a:off x="4930521" y="2286000"/>
-            <a:ext cx="457200" cy="457200"/>
-          </a:xfrm>
-          <a:prstGeom prst="rect">
-            <a:avLst/>
-          </a:prstGeom>
-          <a:noFill/>
-          <a:ln/>
-        </p:spPr>
-        <p:txBody>
-          <a:bodyPr wrap="square" lIns="0" tIns="0" rIns="0" bIns="0" rtlCol="0" anchor="ctr"/>
-          <a:lstStyle/>
-          <a:p>
-            <a:pPr algn="ctr" indent="0" marL="0">
-              <a:buNone/>
-            </a:pPr>
-            <a:r>
-              <a:rPr lang="en-US" sz="1400" b="1" dirty="0">
-                <a:solidFill>
-                  <a:srgbClr val="B8E62E"/>
-                </a:solidFill>
-                <a:latin typeface="Epilogue" pitchFamily="34" charset="0"/>
-                <a:ea typeface="Epilogue" pitchFamily="34" charset="-122"/>
-                <a:cs typeface="Epilogue" pitchFamily="34" charset="-120"/>
-              </a:rPr>
-              <a:t>3</a:t>
-            </a:r>
-            <a:endParaRPr lang="en-US" sz="1400" dirty="0"/>
-          </a:p>
-        </p:txBody>
-      </p:sp>
-      <p:sp>
-        <p:nvSpPr>
-          <p:cNvPr id="30" name="Shape 27"/>
-          <p:cNvSpPr/>
-          <p:nvPr/>
-        </p:nvSpPr>
-        <p:spPr>
-          <a:xfrm>
-            <a:off x="4295546" y="3017520"/>
-            <a:ext cx="1727149" cy="3246120"/>
-          </a:xfrm>
-          <a:prstGeom prst="roundRect">
-            <a:avLst>
-              <a:gd name="adj" fmla="val 8471"/>
-            </a:avLst>
-          </a:prstGeom>
-          <a:solidFill>
-            <a:srgbClr val="15191A"/>
-          </a:solidFill>
-          <a:ln w="9525">
-            <a:solidFill>
-              <a:srgbClr val="262C2E"/>
-            </a:solidFill>
-            <a:prstDash val="solid"/>
-          </a:ln>
-        </p:spPr>
-      </p:sp>
-      <p:sp>
-        <p:nvSpPr>
-          <p:cNvPr id="31" name="Text 28"/>
-          <p:cNvSpPr txBox="1"/>
-          <p:nvPr/>
-        </p:nvSpPr>
-        <p:spPr>
-          <a:xfrm>
-            <a:off x="4478426" y="3200400"/>
-            <a:ext cx="1407109" cy="566928"/>
-          </a:xfrm>
-          <a:prstGeom prst="rect">
-            <a:avLst/>
-          </a:prstGeom>
-          <a:noFill/>
-          <a:ln/>
-        </p:spPr>
-        <p:txBody>
-          <a:bodyPr wrap="square" lIns="0" tIns="0" rIns="0" bIns="0" rtlCol="0" anchor="t"/>
-          <a:lstStyle/>
-          <a:p>
-            <a:pPr indent="0" marL="0">
-              <a:lnSpc>
-                <a:spcPct val="105000"/>
-              </a:lnSpc>
-              <a:buNone/>
-            </a:pPr>
-            <a:r>
-              <a:rPr lang="en-US" sz="1450" b="1" dirty="0">
-                <a:solidFill>
-                  <a:srgbClr val="F4F6F5"/>
-                </a:solidFill>
-                <a:latin typeface="Epilogue" pitchFamily="34" charset="0"/>
-                <a:ea typeface="Epilogue" pitchFamily="34" charset="-122"/>
-                <a:cs typeface="Epilogue" pitchFamily="34" charset="-120"/>
-              </a:rPr>
-              <a:t>The work happens</a:t>
-            </a:r>
-            <a:endParaRPr lang="en-US" sz="1450" dirty="0"/>
-          </a:p>
-        </p:txBody>
-      </p:sp>
-      <p:sp>
-        <p:nvSpPr>
-          <p:cNvPr id="32" name="Text 29"/>
-          <p:cNvSpPr txBox="1"/>
-          <p:nvPr/>
-        </p:nvSpPr>
-        <p:spPr>
-          <a:xfrm>
-            <a:off x="4478426" y="3886200"/>
-            <a:ext cx="1452829" cy="182880"/>
-          </a:xfrm>
-          <a:prstGeom prst="rect">
-            <a:avLst/>
-          </a:prstGeom>
-          <a:noFill/>
-          <a:ln/>
-        </p:spPr>
-        <p:txBody>
-          <a:bodyPr wrap="square" lIns="0" tIns="0" rIns="0" bIns="0" rtlCol="0" anchor="t"/>
-          <a:lstStyle/>
-          <a:p>
-            <a:pPr indent="0" marL="0">
-              <a:buNone/>
-            </a:pPr>
-            <a:r>
-              <a:rPr lang="en-US" sz="750" b="1" spc="150" kern="0" dirty="0">
-                <a:solidFill>
-                  <a:srgbClr val="FF5C7A"/>
-                </a:solidFill>
-                <a:latin typeface="Plus Jakarta Sans" pitchFamily="34" charset="0"/>
-                <a:ea typeface="Plus Jakarta Sans" pitchFamily="34" charset="-122"/>
-                <a:cs typeface="Plus Jakarta Sans" pitchFamily="34" charset="-120"/>
-              </a:rPr>
-              <a:t>USUALLY</a:t>
-            </a:r>
-            <a:endParaRPr lang="en-US" sz="750" dirty="0"/>
-          </a:p>
-        </p:txBody>
-      </p:sp>
-      <p:sp>
-        <p:nvSpPr>
-          <p:cNvPr id="33" name="Text 30"/>
-          <p:cNvSpPr txBox="1"/>
-          <p:nvPr/>
-        </p:nvSpPr>
-        <p:spPr>
-          <a:xfrm>
-            <a:off x="4478426" y="4096512"/>
-            <a:ext cx="1407109" cy="658368"/>
-          </a:xfrm>
-          <a:prstGeom prst="rect">
-            <a:avLst/>
-          </a:prstGeom>
-          <a:noFill/>
-          <a:ln/>
-        </p:spPr>
-        <p:txBody>
-          <a:bodyPr wrap="square" lIns="0" tIns="0" rIns="0" bIns="0" rtlCol="0" anchor="t"/>
-          <a:lstStyle/>
-          <a:p>
-            <a:pPr indent="0" marL="0">
-              <a:lnSpc>
-                <a:spcPct val="112000"/>
-              </a:lnSpc>
-              <a:buNone/>
-            </a:pPr>
-            <a:r>
-              <a:rPr lang="en-US" sz="1100" dirty="0">
-                <a:solidFill>
-                  <a:srgbClr val="9AA7A2"/>
-                </a:solidFill>
-                <a:latin typeface="Manrope" pitchFamily="34" charset="0"/>
-                <a:ea typeface="Manrope" pitchFamily="34" charset="-122"/>
-                <a:cs typeface="Manrope" pitchFamily="34" charset="-120"/>
-              </a:rPr>
-              <a:t>Status lives in people's heads.</a:t>
-            </a:r>
-            <a:endParaRPr lang="en-US" sz="1100" dirty="0"/>
-          </a:p>
-        </p:txBody>
-      </p:sp>
-      <p:sp>
-        <p:nvSpPr>
-          <p:cNvPr id="34" name="Shape 31"/>
-          <p:cNvSpPr/>
-          <p:nvPr/>
-        </p:nvSpPr>
-        <p:spPr>
-          <a:xfrm>
-            <a:off x="4478426" y="4828032"/>
-            <a:ext cx="1361389" cy="0"/>
-          </a:xfrm>
-          <a:prstGeom prst="line">
-            <a:avLst/>
-          </a:prstGeom>
-          <a:noFill/>
-          <a:ln w="9525">
-            <a:solidFill>
-              <a:srgbClr val="262C2E"/>
-            </a:solidFill>
-            <a:prstDash val="solid"/>
-          </a:ln>
-        </p:spPr>
-      </p:sp>
-      <p:sp>
-        <p:nvSpPr>
-          <p:cNvPr id="35" name="Text 32"/>
-          <p:cNvSpPr txBox="1"/>
-          <p:nvPr/>
-        </p:nvSpPr>
-        <p:spPr>
-          <a:xfrm>
-            <a:off x="4478426" y="4937760"/>
-            <a:ext cx="1452829" cy="182880"/>
-          </a:xfrm>
-          <a:prstGeom prst="rect">
-            <a:avLst/>
-          </a:prstGeom>
-          <a:noFill/>
-          <a:ln/>
-        </p:spPr>
-        <p:txBody>
-          <a:bodyPr wrap="square" lIns="0" tIns="0" rIns="0" bIns="0" rtlCol="0" anchor="t"/>
-          <a:lstStyle/>
-          <a:p>
-            <a:pPr indent="0" marL="0">
-              <a:buNone/>
-            </a:pPr>
-            <a:r>
-              <a:rPr lang="en-US" sz="750" b="1" spc="150" kern="0" dirty="0">
-                <a:solidFill>
-                  <a:srgbClr val="B8E62E"/>
-                </a:solidFill>
-                <a:latin typeface="Plus Jakarta Sans" pitchFamily="34" charset="0"/>
-                <a:ea typeface="Plus Jakarta Sans" pitchFamily="34" charset="-122"/>
-                <a:cs typeface="Plus Jakarta Sans" pitchFamily="34" charset="-120"/>
-              </a:rPr>
-              <a:t>WITH BOD APP</a:t>
-            </a:r>
-            <a:endParaRPr lang="en-US" sz="750" dirty="0"/>
-          </a:p>
-        </p:txBody>
-      </p:sp>
-      <p:sp>
-        <p:nvSpPr>
-          <p:cNvPr id="36" name="Text 33"/>
-          <p:cNvSpPr txBox="1"/>
-          <p:nvPr/>
-        </p:nvSpPr>
-        <p:spPr>
-          <a:xfrm>
-            <a:off x="4478426" y="5148072"/>
-            <a:ext cx="1407109" cy="1005840"/>
-          </a:xfrm>
-          <a:prstGeom prst="rect">
-            <a:avLst/>
-          </a:prstGeom>
-          <a:noFill/>
-          <a:ln/>
-        </p:spPr>
-        <p:txBody>
-          <a:bodyPr wrap="square" lIns="0" tIns="0" rIns="0" bIns="0" rtlCol="0" anchor="t"/>
-          <a:lstStyle/>
-          <a:p>
-            <a:pPr indent="0" marL="0">
-              <a:lnSpc>
-                <a:spcPct val="112000"/>
-              </a:lnSpc>
-              <a:buNone/>
-            </a:pPr>
-            <a:r>
-              <a:rPr lang="en-US" sz="1150" b="1" dirty="0">
-                <a:solidFill>
-                  <a:srgbClr val="F4F6F5"/>
-                </a:solidFill>
-                <a:latin typeface="Manrope" pitchFamily="34" charset="0"/>
-                <a:ea typeface="Manrope" pitchFamily="34" charset="-122"/>
-                <a:cs typeface="Manrope" pitchFamily="34" charset="-120"/>
-              </a:rPr>
-              <a:t>Everyone can see where each job is, and how it's going.</a:t>
-            </a:r>
-            <a:endParaRPr lang="en-US" sz="1150" dirty="0"/>
-          </a:p>
-        </p:txBody>
-      </p:sp>
-      <p:sp>
-        <p:nvSpPr>
-          <p:cNvPr id="37" name="Shape 34"/>
-          <p:cNvSpPr/>
-          <p:nvPr/>
-        </p:nvSpPr>
-        <p:spPr>
-          <a:xfrm>
-            <a:off x="6803974" y="2286000"/>
-            <a:ext cx="457200" cy="457200"/>
-          </a:xfrm>
-          <a:prstGeom prst="ellipse">
-            <a:avLst/>
-          </a:prstGeom>
-          <a:solidFill>
-            <a:srgbClr val="0B0D0C"/>
-          </a:solidFill>
-          <a:ln w="22225">
-            <a:solidFill>
-              <a:srgbClr val="B8E62E"/>
-            </a:solidFill>
-            <a:prstDash val="solid"/>
-          </a:ln>
-        </p:spPr>
-      </p:sp>
-      <p:sp>
-        <p:nvSpPr>
-          <p:cNvPr id="38" name="Text 35"/>
-          <p:cNvSpPr txBox="1"/>
-          <p:nvPr/>
-        </p:nvSpPr>
-        <p:spPr>
-          <a:xfrm>
-            <a:off x="6803974" y="2286000"/>
-            <a:ext cx="457200" cy="457200"/>
-          </a:xfrm>
-          <a:prstGeom prst="rect">
-            <a:avLst/>
-          </a:prstGeom>
-          <a:noFill/>
-          <a:ln/>
-        </p:spPr>
-        <p:txBody>
-          <a:bodyPr wrap="square" lIns="0" tIns="0" rIns="0" bIns="0" rtlCol="0" anchor="ctr"/>
-          <a:lstStyle/>
-          <a:p>
-            <a:pPr algn="ctr" indent="0" marL="0">
-              <a:buNone/>
-            </a:pPr>
-            <a:r>
-              <a:rPr lang="en-US" sz="1400" b="1" dirty="0">
-                <a:solidFill>
-                  <a:srgbClr val="B8E62E"/>
-                </a:solidFill>
-                <a:latin typeface="Epilogue" pitchFamily="34" charset="0"/>
-                <a:ea typeface="Epilogue" pitchFamily="34" charset="-122"/>
-                <a:cs typeface="Epilogue" pitchFamily="34" charset="-120"/>
-              </a:rPr>
-              <a:t>4</a:t>
-            </a:r>
-            <a:endParaRPr lang="en-US" sz="1400" dirty="0"/>
-          </a:p>
-        </p:txBody>
-      </p:sp>
-      <p:sp>
-        <p:nvSpPr>
-          <p:cNvPr id="39" name="Shape 36"/>
-          <p:cNvSpPr/>
-          <p:nvPr/>
-        </p:nvSpPr>
-        <p:spPr>
-          <a:xfrm>
-            <a:off x="6169000" y="3017520"/>
-            <a:ext cx="1727149" cy="3246120"/>
-          </a:xfrm>
-          <a:prstGeom prst="roundRect">
-            <a:avLst>
-              <a:gd name="adj" fmla="val 8471"/>
-            </a:avLst>
-          </a:prstGeom>
-          <a:solidFill>
-            <a:srgbClr val="15191A"/>
-          </a:solidFill>
-          <a:ln w="9525">
-            <a:solidFill>
-              <a:srgbClr val="262C2E"/>
-            </a:solidFill>
-            <a:prstDash val="solid"/>
-          </a:ln>
-        </p:spPr>
-      </p:sp>
-      <p:sp>
-        <p:nvSpPr>
-          <p:cNvPr id="40" name="Text 37"/>
-          <p:cNvSpPr txBox="1"/>
-          <p:nvPr/>
-        </p:nvSpPr>
-        <p:spPr>
-          <a:xfrm>
-            <a:off x="6351880" y="3200400"/>
-            <a:ext cx="1407109" cy="566928"/>
-          </a:xfrm>
-          <a:prstGeom prst="rect">
-            <a:avLst/>
-          </a:prstGeom>
-          <a:noFill/>
-          <a:ln/>
-        </p:spPr>
-        <p:txBody>
-          <a:bodyPr wrap="square" lIns="0" tIns="0" rIns="0" bIns="0" rtlCol="0" anchor="t"/>
-          <a:lstStyle/>
-          <a:p>
-            <a:pPr indent="0" marL="0">
-              <a:lnSpc>
-                <a:spcPct val="105000"/>
-              </a:lnSpc>
-              <a:buNone/>
-            </a:pPr>
-            <a:r>
-              <a:rPr lang="en-US" sz="1450" b="1" dirty="0">
-                <a:solidFill>
-                  <a:srgbClr val="F4F6F5"/>
-                </a:solidFill>
-                <a:latin typeface="Epilogue" pitchFamily="34" charset="0"/>
-                <a:ea typeface="Epilogue" pitchFamily="34" charset="-122"/>
-                <a:cs typeface="Epilogue" pitchFamily="34" charset="-120"/>
-              </a:rPr>
-              <a:t>The client goes quiet</a:t>
-            </a:r>
-            <a:endParaRPr lang="en-US" sz="1450" dirty="0"/>
-          </a:p>
-        </p:txBody>
-      </p:sp>
-      <p:sp>
-        <p:nvSpPr>
-          <p:cNvPr id="41" name="Text 38"/>
-          <p:cNvSpPr txBox="1"/>
-          <p:nvPr/>
-        </p:nvSpPr>
-        <p:spPr>
-          <a:xfrm>
-            <a:off x="6351880" y="3886200"/>
-            <a:ext cx="1452829" cy="182880"/>
-          </a:xfrm>
-          <a:prstGeom prst="rect">
-            <a:avLst/>
-          </a:prstGeom>
-          <a:noFill/>
-          <a:ln/>
-        </p:spPr>
-        <p:txBody>
-          <a:bodyPr wrap="square" lIns="0" tIns="0" rIns="0" bIns="0" rtlCol="0" anchor="t"/>
-          <a:lstStyle/>
-          <a:p>
-            <a:pPr indent="0" marL="0">
-              <a:buNone/>
-            </a:pPr>
-            <a:r>
-              <a:rPr lang="en-US" sz="750" b="1" spc="150" kern="0" dirty="0">
-                <a:solidFill>
-                  <a:srgbClr val="FF5C7A"/>
-                </a:solidFill>
-                <a:latin typeface="Plus Jakarta Sans" pitchFamily="34" charset="0"/>
-                <a:ea typeface="Plus Jakarta Sans" pitchFamily="34" charset="-122"/>
-                <a:cs typeface="Plus Jakarta Sans" pitchFamily="34" charset="-120"/>
-              </a:rPr>
-              <a:t>USUALLY</a:t>
-            </a:r>
-            <a:endParaRPr lang="en-US" sz="750" dirty="0"/>
-          </a:p>
-        </p:txBody>
-      </p:sp>
-      <p:sp>
-        <p:nvSpPr>
-          <p:cNvPr id="42" name="Text 39"/>
-          <p:cNvSpPr txBox="1"/>
-          <p:nvPr/>
-        </p:nvSpPr>
-        <p:spPr>
-          <a:xfrm>
-            <a:off x="6351880" y="4096512"/>
-            <a:ext cx="1407109" cy="658368"/>
-          </a:xfrm>
-          <a:prstGeom prst="rect">
-            <a:avLst/>
-          </a:prstGeom>
-          <a:noFill/>
-          <a:ln/>
-        </p:spPr>
-        <p:txBody>
-          <a:bodyPr wrap="square" lIns="0" tIns="0" rIns="0" bIns="0" rtlCol="0" anchor="t"/>
-          <a:lstStyle/>
-          <a:p>
-            <a:pPr indent="0" marL="0">
-              <a:lnSpc>
-                <a:spcPct val="112000"/>
-              </a:lnSpc>
-              <a:buNone/>
-            </a:pPr>
-            <a:r>
-              <a:rPr lang="en-US" sz="1100" dirty="0">
-                <a:solidFill>
-                  <a:srgbClr val="9AA7A2"/>
-                </a:solidFill>
-                <a:latin typeface="Manrope" pitchFamily="34" charset="0"/>
-                <a:ea typeface="Manrope" pitchFamily="34" charset="-122"/>
-                <a:cs typeface="Manrope" pitchFamily="34" charset="-120"/>
-              </a:rPr>
-              <a:t>You remember three days later.</a:t>
-            </a:r>
-            <a:endParaRPr lang="en-US" sz="1100" dirty="0"/>
-          </a:p>
-        </p:txBody>
-      </p:sp>
-      <p:sp>
-        <p:nvSpPr>
-          <p:cNvPr id="43" name="Shape 40"/>
-          <p:cNvSpPr/>
-          <p:nvPr/>
-        </p:nvSpPr>
-        <p:spPr>
-          <a:xfrm>
-            <a:off x="6351880" y="4828032"/>
-            <a:ext cx="1361389" cy="0"/>
-          </a:xfrm>
-          <a:prstGeom prst="line">
-            <a:avLst/>
-          </a:prstGeom>
-          <a:noFill/>
-          <a:ln w="9525">
-            <a:solidFill>
-              <a:srgbClr val="262C2E"/>
-            </a:solidFill>
-            <a:prstDash val="solid"/>
-          </a:ln>
-        </p:spPr>
-      </p:sp>
-      <p:sp>
-        <p:nvSpPr>
-          <p:cNvPr id="44" name="Text 41"/>
-          <p:cNvSpPr txBox="1"/>
-          <p:nvPr/>
-        </p:nvSpPr>
-        <p:spPr>
-          <a:xfrm>
-            <a:off x="6351880" y="4937760"/>
-            <a:ext cx="1452829" cy="182880"/>
-          </a:xfrm>
-          <a:prstGeom prst="rect">
-            <a:avLst/>
-          </a:prstGeom>
-          <a:noFill/>
-          <a:ln/>
-        </p:spPr>
-        <p:txBody>
-          <a:bodyPr wrap="square" lIns="0" tIns="0" rIns="0" bIns="0" rtlCol="0" anchor="t"/>
-          <a:lstStyle/>
-          <a:p>
-            <a:pPr indent="0" marL="0">
-              <a:buNone/>
-            </a:pPr>
-            <a:r>
-              <a:rPr lang="en-US" sz="750" b="1" spc="150" kern="0" dirty="0">
-                <a:solidFill>
-                  <a:srgbClr val="B8E62E"/>
-                </a:solidFill>
-                <a:latin typeface="Plus Jakarta Sans" pitchFamily="34" charset="0"/>
-                <a:ea typeface="Plus Jakarta Sans" pitchFamily="34" charset="-122"/>
-                <a:cs typeface="Plus Jakarta Sans" pitchFamily="34" charset="-120"/>
-              </a:rPr>
-              <a:t>WITH BOD APP</a:t>
-            </a:r>
-            <a:endParaRPr lang="en-US" sz="750" dirty="0"/>
-          </a:p>
-        </p:txBody>
-      </p:sp>
-      <p:sp>
-        <p:nvSpPr>
-          <p:cNvPr id="45" name="Text 42"/>
-          <p:cNvSpPr txBox="1"/>
-          <p:nvPr/>
-        </p:nvSpPr>
-        <p:spPr>
-          <a:xfrm>
-            <a:off x="6351880" y="5148072"/>
-            <a:ext cx="1407109" cy="1005840"/>
-          </a:xfrm>
-          <a:prstGeom prst="rect">
-            <a:avLst/>
-          </a:prstGeom>
-          <a:noFill/>
-          <a:ln/>
-        </p:spPr>
-        <p:txBody>
-          <a:bodyPr wrap="square" lIns="0" tIns="0" rIns="0" bIns="0" rtlCol="0" anchor="t"/>
-          <a:lstStyle/>
-          <a:p>
-            <a:pPr indent="0" marL="0">
-              <a:lnSpc>
-                <a:spcPct val="112000"/>
-              </a:lnSpc>
-              <a:buNone/>
-            </a:pPr>
-            <a:r>
-              <a:rPr lang="en-US" sz="1150" b="1" dirty="0">
-                <a:solidFill>
-                  <a:srgbClr val="F4F6F5"/>
-                </a:solidFill>
-                <a:latin typeface="Manrope" pitchFamily="34" charset="0"/>
-                <a:ea typeface="Manrope" pitchFamily="34" charset="-122"/>
-                <a:cs typeface="Manrope" pitchFamily="34" charset="-120"/>
-              </a:rPr>
-              <a:t>Bod App drafts the follow-up after two.</a:t>
-            </a:r>
-            <a:endParaRPr lang="en-US" sz="1150" dirty="0"/>
-          </a:p>
-        </p:txBody>
-      </p:sp>
-      <p:sp>
-        <p:nvSpPr>
-          <p:cNvPr id="46" name="Shape 43"/>
-          <p:cNvSpPr/>
-          <p:nvPr/>
-        </p:nvSpPr>
-        <p:spPr>
-          <a:xfrm>
-            <a:off x="8677427" y="2286000"/>
-            <a:ext cx="457200" cy="457200"/>
-          </a:xfrm>
-          <a:prstGeom prst="ellipse">
-            <a:avLst/>
-          </a:prstGeom>
-          <a:solidFill>
-            <a:srgbClr val="0B0D0C"/>
-          </a:solidFill>
-          <a:ln w="22225">
-            <a:solidFill>
-              <a:srgbClr val="B8E62E"/>
-            </a:solidFill>
-            <a:prstDash val="solid"/>
-          </a:ln>
-        </p:spPr>
-      </p:sp>
-      <p:sp>
-        <p:nvSpPr>
-          <p:cNvPr id="47" name="Text 44"/>
-          <p:cNvSpPr txBox="1"/>
-          <p:nvPr/>
-        </p:nvSpPr>
-        <p:spPr>
-          <a:xfrm>
-            <a:off x="8677427" y="2286000"/>
-            <a:ext cx="457200" cy="457200"/>
-          </a:xfrm>
-          <a:prstGeom prst="rect">
-            <a:avLst/>
-          </a:prstGeom>
-          <a:noFill/>
-          <a:ln/>
-        </p:spPr>
-        <p:txBody>
-          <a:bodyPr wrap="square" lIns="0" tIns="0" rIns="0" bIns="0" rtlCol="0" anchor="ctr"/>
-          <a:lstStyle/>
-          <a:p>
-            <a:pPr algn="ctr" indent="0" marL="0">
-              <a:buNone/>
-            </a:pPr>
-            <a:r>
-              <a:rPr lang="en-US" sz="1400" b="1" dirty="0">
-                <a:solidFill>
-                  <a:srgbClr val="B8E62E"/>
-                </a:solidFill>
-                <a:latin typeface="Epilogue" pitchFamily="34" charset="0"/>
-                <a:ea typeface="Epilogue" pitchFamily="34" charset="-122"/>
-                <a:cs typeface="Epilogue" pitchFamily="34" charset="-120"/>
-              </a:rPr>
-              <a:t>5</a:t>
-            </a:r>
-            <a:endParaRPr lang="en-US" sz="1400" dirty="0"/>
-          </a:p>
-        </p:txBody>
-      </p:sp>
-      <p:sp>
-        <p:nvSpPr>
-          <p:cNvPr id="48" name="Shape 45"/>
-          <p:cNvSpPr/>
-          <p:nvPr/>
-        </p:nvSpPr>
-        <p:spPr>
-          <a:xfrm>
-            <a:off x="8042453" y="3017520"/>
-            <a:ext cx="1727149" cy="3246120"/>
-          </a:xfrm>
-          <a:prstGeom prst="roundRect">
-            <a:avLst>
-              <a:gd name="adj" fmla="val 8471"/>
-            </a:avLst>
-          </a:prstGeom>
-          <a:solidFill>
-            <a:srgbClr val="15191A"/>
-          </a:solidFill>
-          <a:ln w="9525">
-            <a:solidFill>
-              <a:srgbClr val="262C2E"/>
-            </a:solidFill>
-            <a:prstDash val="solid"/>
-          </a:ln>
-        </p:spPr>
-      </p:sp>
-      <p:sp>
-        <p:nvSpPr>
-          <p:cNvPr id="49" name="Text 46"/>
-          <p:cNvSpPr txBox="1"/>
-          <p:nvPr/>
-        </p:nvSpPr>
-        <p:spPr>
-          <a:xfrm>
-            <a:off x="8225333" y="3200400"/>
-            <a:ext cx="1407109" cy="566928"/>
-          </a:xfrm>
-          <a:prstGeom prst="rect">
-            <a:avLst/>
-          </a:prstGeom>
-          <a:noFill/>
-          <a:ln/>
-        </p:spPr>
-        <p:txBody>
-          <a:bodyPr wrap="square" lIns="0" tIns="0" rIns="0" bIns="0" rtlCol="0" anchor="t"/>
-          <a:lstStyle/>
-          <a:p>
-            <a:pPr indent="0" marL="0">
-              <a:lnSpc>
-                <a:spcPct val="105000"/>
-              </a:lnSpc>
-              <a:buNone/>
-            </a:pPr>
-            <a:r>
-              <a:rPr lang="en-US" sz="1450" b="1" dirty="0">
-                <a:solidFill>
-                  <a:srgbClr val="F4F6F5"/>
-                </a:solidFill>
-                <a:latin typeface="Epilogue" pitchFamily="34" charset="0"/>
-                <a:ea typeface="Epilogue" pitchFamily="34" charset="-122"/>
-                <a:cs typeface="Epilogue" pitchFamily="34" charset="-120"/>
-              </a:rPr>
-              <a:t>The job is done</a:t>
-            </a:r>
-            <a:endParaRPr lang="en-US" sz="1450" dirty="0"/>
-          </a:p>
-        </p:txBody>
-      </p:sp>
-      <p:sp>
-        <p:nvSpPr>
-          <p:cNvPr id="50" name="Text 47"/>
-          <p:cNvSpPr txBox="1"/>
-          <p:nvPr/>
-        </p:nvSpPr>
-        <p:spPr>
-          <a:xfrm>
-            <a:off x="8225333" y="3886200"/>
-            <a:ext cx="1452829" cy="182880"/>
-          </a:xfrm>
-          <a:prstGeom prst="rect">
-            <a:avLst/>
-          </a:prstGeom>
-          <a:noFill/>
-          <a:ln/>
-        </p:spPr>
-        <p:txBody>
-          <a:bodyPr wrap="square" lIns="0" tIns="0" rIns="0" bIns="0" rtlCol="0" anchor="t"/>
-          <a:lstStyle/>
-          <a:p>
-            <a:pPr indent="0" marL="0">
-              <a:buNone/>
-            </a:pPr>
-            <a:r>
-              <a:rPr lang="en-US" sz="750" b="1" spc="150" kern="0" dirty="0">
-                <a:solidFill>
-                  <a:srgbClr val="FF5C7A"/>
-                </a:solidFill>
-                <a:latin typeface="Plus Jakarta Sans" pitchFamily="34" charset="0"/>
-                <a:ea typeface="Plus Jakarta Sans" pitchFamily="34" charset="-122"/>
-                <a:cs typeface="Plus Jakarta Sans" pitchFamily="34" charset="-120"/>
-              </a:rPr>
-              <a:t>USUALLY</a:t>
-            </a:r>
-            <a:endParaRPr lang="en-US" sz="750" dirty="0"/>
-          </a:p>
-        </p:txBody>
-      </p:sp>
-      <p:sp>
-        <p:nvSpPr>
-          <p:cNvPr id="51" name="Text 48"/>
-          <p:cNvSpPr txBox="1"/>
-          <p:nvPr/>
-        </p:nvSpPr>
-        <p:spPr>
-          <a:xfrm>
-            <a:off x="8225333" y="4096512"/>
-            <a:ext cx="1407109" cy="658368"/>
-          </a:xfrm>
-          <a:prstGeom prst="rect">
-            <a:avLst/>
-          </a:prstGeom>
-          <a:noFill/>
-          <a:ln/>
-        </p:spPr>
-        <p:txBody>
-          <a:bodyPr wrap="square" lIns="0" tIns="0" rIns="0" bIns="0" rtlCol="0" anchor="t"/>
-          <a:lstStyle/>
-          <a:p>
-            <a:pPr indent="0" marL="0">
-              <a:lnSpc>
-                <a:spcPct val="112000"/>
-              </a:lnSpc>
-              <a:buNone/>
-            </a:pPr>
-            <a:r>
-              <a:rPr lang="en-US" sz="1100" dirty="0">
-                <a:solidFill>
-                  <a:srgbClr val="9AA7A2"/>
-                </a:solidFill>
-                <a:latin typeface="Manrope" pitchFamily="34" charset="0"/>
-                <a:ea typeface="Manrope" pitchFamily="34" charset="-122"/>
-                <a:cs typeface="Manrope" pitchFamily="34" charset="-120"/>
-              </a:rPr>
-              <a:t>It sits there, unbilled.</a:t>
-            </a:r>
-            <a:endParaRPr lang="en-US" sz="1100" dirty="0"/>
-          </a:p>
-        </p:txBody>
-      </p:sp>
-      <p:sp>
-        <p:nvSpPr>
-          <p:cNvPr id="52" name="Shape 49"/>
-          <p:cNvSpPr/>
-          <p:nvPr/>
-        </p:nvSpPr>
-        <p:spPr>
-          <a:xfrm>
-            <a:off x="8225333" y="4828032"/>
-            <a:ext cx="1361389" cy="0"/>
-          </a:xfrm>
-          <a:prstGeom prst="line">
-            <a:avLst/>
-          </a:prstGeom>
-          <a:noFill/>
-          <a:ln w="9525">
-            <a:solidFill>
-              <a:srgbClr val="262C2E"/>
-            </a:solidFill>
-            <a:prstDash val="solid"/>
-          </a:ln>
-        </p:spPr>
-      </p:sp>
-      <p:sp>
-        <p:nvSpPr>
-          <p:cNvPr id="53" name="Text 50"/>
-          <p:cNvSpPr txBox="1"/>
-          <p:nvPr/>
-        </p:nvSpPr>
-        <p:spPr>
-          <a:xfrm>
-            <a:off x="8225333" y="4937760"/>
-            <a:ext cx="1452829" cy="182880"/>
-          </a:xfrm>
-          <a:prstGeom prst="rect">
-            <a:avLst/>
-          </a:prstGeom>
-          <a:noFill/>
-          <a:ln/>
-        </p:spPr>
-        <p:txBody>
-          <a:bodyPr wrap="square" lIns="0" tIns="0" rIns="0" bIns="0" rtlCol="0" anchor="t"/>
-          <a:lstStyle/>
-          <a:p>
-            <a:pPr indent="0" marL="0">
-              <a:buNone/>
-            </a:pPr>
-            <a:r>
-              <a:rPr lang="en-US" sz="750" b="1" spc="150" kern="0" dirty="0">
-                <a:solidFill>
-                  <a:srgbClr val="B8E62E"/>
-                </a:solidFill>
-                <a:latin typeface="Plus Jakarta Sans" pitchFamily="34" charset="0"/>
-                <a:ea typeface="Plus Jakarta Sans" pitchFamily="34" charset="-122"/>
-                <a:cs typeface="Plus Jakarta Sans" pitchFamily="34" charset="-120"/>
-              </a:rPr>
-              <a:t>WITH BOD APP</a:t>
-            </a:r>
-            <a:endParaRPr lang="en-US" sz="750" dirty="0"/>
-          </a:p>
-        </p:txBody>
-      </p:sp>
-      <p:sp>
-        <p:nvSpPr>
-          <p:cNvPr id="54" name="Text 51"/>
-          <p:cNvSpPr txBox="1"/>
-          <p:nvPr/>
-        </p:nvSpPr>
-        <p:spPr>
-          <a:xfrm>
-            <a:off x="8225333" y="5148072"/>
-            <a:ext cx="1407109" cy="1005840"/>
-          </a:xfrm>
-          <a:prstGeom prst="rect">
-            <a:avLst/>
-          </a:prstGeom>
-          <a:noFill/>
-          <a:ln/>
-        </p:spPr>
-        <p:txBody>
-          <a:bodyPr wrap="square" lIns="0" tIns="0" rIns="0" bIns="0" rtlCol="0" anchor="t"/>
-          <a:lstStyle/>
-          <a:p>
-            <a:pPr indent="0" marL="0">
-              <a:lnSpc>
-                <a:spcPct val="112000"/>
-              </a:lnSpc>
-              <a:buNone/>
-            </a:pPr>
-            <a:r>
-              <a:rPr lang="en-US" sz="1150" b="1" dirty="0">
-                <a:solidFill>
-                  <a:srgbClr val="F4F6F5"/>
-                </a:solidFill>
-                <a:latin typeface="Manrope" pitchFamily="34" charset="0"/>
-                <a:ea typeface="Manrope" pitchFamily="34" charset="-122"/>
-                <a:cs typeface="Manrope" pitchFamily="34" charset="-120"/>
-              </a:rPr>
-              <a:t>It moves to a Ready to bill list, automatically.</a:t>
-            </a:r>
-            <a:endParaRPr lang="en-US" sz="1150" dirty="0"/>
-          </a:p>
-        </p:txBody>
-      </p:sp>
-      <p:sp>
-        <p:nvSpPr>
-          <p:cNvPr id="55" name="Shape 52"/>
-          <p:cNvSpPr/>
-          <p:nvPr/>
-        </p:nvSpPr>
-        <p:spPr>
-          <a:xfrm>
-            <a:off x="10550881" y="2286000"/>
-            <a:ext cx="457200" cy="457200"/>
-          </a:xfrm>
-          <a:prstGeom prst="ellipse">
-            <a:avLst/>
-          </a:prstGeom>
-          <a:solidFill>
-            <a:srgbClr val="B8E62E"/>
-          </a:solidFill>
-          <a:ln w="22225">
-            <a:solidFill>
-              <a:srgbClr val="B8E62E"/>
-            </a:solidFill>
-            <a:prstDash val="solid"/>
-          </a:ln>
-        </p:spPr>
-      </p:sp>
-      <p:sp>
-        <p:nvSpPr>
-          <p:cNvPr id="56" name="Text 53"/>
-          <p:cNvSpPr txBox="1"/>
-          <p:nvPr/>
-        </p:nvSpPr>
-        <p:spPr>
-          <a:xfrm>
-            <a:off x="10550881" y="2286000"/>
-            <a:ext cx="457200" cy="457200"/>
-          </a:xfrm>
-          <a:prstGeom prst="rect">
-            <a:avLst/>
-          </a:prstGeom>
-          <a:noFill/>
-          <a:ln/>
-        </p:spPr>
-        <p:txBody>
-          <a:bodyPr wrap="square" lIns="0" tIns="0" rIns="0" bIns="0" rtlCol="0" anchor="ctr"/>
-          <a:lstStyle/>
-          <a:p>
-            <a:pPr algn="ctr" indent="0" marL="0">
-              <a:buNone/>
-            </a:pPr>
-            <a:r>
-              <a:rPr lang="en-US" sz="1400" b="1" dirty="0">
-                <a:solidFill>
-                  <a:srgbClr val="0B0D0C"/>
-                </a:solidFill>
-                <a:latin typeface="Epilogue" pitchFamily="34" charset="0"/>
-                <a:ea typeface="Epilogue" pitchFamily="34" charset="-122"/>
-                <a:cs typeface="Epilogue" pitchFamily="34" charset="-120"/>
-              </a:rPr>
-              <a:t>6</a:t>
-            </a:r>
-            <a:endParaRPr lang="en-US" sz="1400" dirty="0"/>
-          </a:p>
-        </p:txBody>
-      </p:sp>
-      <p:sp>
-        <p:nvSpPr>
-          <p:cNvPr id="57" name="Shape 54"/>
-          <p:cNvSpPr/>
-          <p:nvPr/>
-        </p:nvSpPr>
-        <p:spPr>
-          <a:xfrm>
-            <a:off x="9915906" y="3017520"/>
-            <a:ext cx="1727149" cy="3246120"/>
-          </a:xfrm>
-          <a:prstGeom prst="roundRect">
-            <a:avLst>
-              <a:gd name="adj" fmla="val 8471"/>
-            </a:avLst>
-          </a:prstGeom>
-          <a:solidFill>
-            <a:srgbClr val="15191A"/>
-          </a:solidFill>
-          <a:ln w="9525">
-            <a:solidFill>
-              <a:srgbClr val="262C2E"/>
-            </a:solidFill>
-            <a:prstDash val="solid"/>
-          </a:ln>
-        </p:spPr>
-      </p:sp>
-      <p:sp>
-        <p:nvSpPr>
-          <p:cNvPr id="58" name="Text 55"/>
-          <p:cNvSpPr txBox="1"/>
-          <p:nvPr/>
-        </p:nvSpPr>
-        <p:spPr>
-          <a:xfrm>
-            <a:off x="10098786" y="3200400"/>
-            <a:ext cx="1407109" cy="566928"/>
-          </a:xfrm>
-          <a:prstGeom prst="rect">
-            <a:avLst/>
-          </a:prstGeom>
-          <a:noFill/>
-          <a:ln/>
-        </p:spPr>
-        <p:txBody>
-          <a:bodyPr wrap="square" lIns="0" tIns="0" rIns="0" bIns="0" rtlCol="0" anchor="t"/>
-          <a:lstStyle/>
-          <a:p>
-            <a:pPr indent="0" marL="0">
-              <a:lnSpc>
-                <a:spcPct val="105000"/>
-              </a:lnSpc>
-              <a:buNone/>
-            </a:pPr>
-            <a:r>
-              <a:rPr lang="en-US" sz="1450" b="1" dirty="0">
-                <a:solidFill>
-                  <a:srgbClr val="F4F6F5"/>
-                </a:solidFill>
-                <a:latin typeface="Epilogue" pitchFamily="34" charset="0"/>
-                <a:ea typeface="Epilogue" pitchFamily="34" charset="-122"/>
-                <a:cs typeface="Epilogue" pitchFamily="34" charset="-120"/>
-              </a:rPr>
-              <a:t>It gets invoiced</a:t>
-            </a:r>
-            <a:endParaRPr lang="en-US" sz="1450" dirty="0"/>
-          </a:p>
-        </p:txBody>
-      </p:sp>
-      <p:sp>
-        <p:nvSpPr>
-          <p:cNvPr id="59" name="Text 56"/>
-          <p:cNvSpPr txBox="1"/>
-          <p:nvPr/>
-        </p:nvSpPr>
-        <p:spPr>
-          <a:xfrm>
-            <a:off x="10098786" y="3886200"/>
-            <a:ext cx="1452829" cy="182880"/>
-          </a:xfrm>
-          <a:prstGeom prst="rect">
-            <a:avLst/>
-          </a:prstGeom>
-          <a:noFill/>
-          <a:ln/>
-        </p:spPr>
-        <p:txBody>
-          <a:bodyPr wrap="square" lIns="0" tIns="0" rIns="0" bIns="0" rtlCol="0" anchor="t"/>
-          <a:lstStyle/>
-          <a:p>
-            <a:pPr indent="0" marL="0">
-              <a:buNone/>
-            </a:pPr>
-            <a:r>
-              <a:rPr lang="en-US" sz="750" b="1" spc="150" kern="0" dirty="0">
-                <a:solidFill>
-                  <a:srgbClr val="FF5C7A"/>
-                </a:solidFill>
-                <a:latin typeface="Plus Jakarta Sans" pitchFamily="34" charset="0"/>
-                <a:ea typeface="Plus Jakarta Sans" pitchFamily="34" charset="-122"/>
-                <a:cs typeface="Plus Jakarta Sans" pitchFamily="34" charset="-120"/>
-              </a:rPr>
-              <a:t>USUALLY</a:t>
-            </a:r>
-            <a:endParaRPr lang="en-US" sz="750" dirty="0"/>
-          </a:p>
-        </p:txBody>
-      </p:sp>
-      <p:sp>
-        <p:nvSpPr>
-          <p:cNvPr id="60" name="Text 57"/>
-          <p:cNvSpPr txBox="1"/>
-          <p:nvPr/>
-        </p:nvSpPr>
-        <p:spPr>
-          <a:xfrm>
-            <a:off x="10098786" y="4096512"/>
-            <a:ext cx="1407109" cy="658368"/>
-          </a:xfrm>
-          <a:prstGeom prst="rect">
-            <a:avLst/>
-          </a:prstGeom>
-          <a:noFill/>
-          <a:ln/>
-        </p:spPr>
-        <p:txBody>
-          <a:bodyPr wrap="square" lIns="0" tIns="0" rIns="0" bIns="0" rtlCol="0" anchor="t"/>
-          <a:lstStyle/>
-          <a:p>
-            <a:pPr indent="0" marL="0">
-              <a:lnSpc>
-                <a:spcPct val="112000"/>
-              </a:lnSpc>
-              <a:buNone/>
-            </a:pPr>
-            <a:r>
-              <a:rPr lang="en-US" sz="1100" dirty="0">
-                <a:solidFill>
-                  <a:srgbClr val="9AA7A2"/>
-                </a:solidFill>
-                <a:latin typeface="Manrope" pitchFamily="34" charset="0"/>
-                <a:ea typeface="Manrope" pitchFamily="34" charset="-122"/>
-                <a:cs typeface="Manrope" pitchFamily="34" charset="-120"/>
-              </a:rPr>
-              <a:t>Someone digs through chats at month end.</a:t>
-            </a:r>
-            <a:endParaRPr lang="en-US" sz="1100" dirty="0"/>
-          </a:p>
-        </p:txBody>
-      </p:sp>
-      <p:sp>
-        <p:nvSpPr>
-          <p:cNvPr id="61" name="Shape 58"/>
-          <p:cNvSpPr/>
-          <p:nvPr/>
-        </p:nvSpPr>
-        <p:spPr>
-          <a:xfrm>
-            <a:off x="10098786" y="4828032"/>
-            <a:ext cx="1361389" cy="0"/>
-          </a:xfrm>
-          <a:prstGeom prst="line">
-            <a:avLst/>
-          </a:prstGeom>
-          <a:noFill/>
-          <a:ln w="9525">
-            <a:solidFill>
-              <a:srgbClr val="262C2E"/>
-            </a:solidFill>
-            <a:prstDash val="solid"/>
-          </a:ln>
-        </p:spPr>
-      </p:sp>
-      <p:sp>
-        <p:nvSpPr>
-          <p:cNvPr id="62" name="Text 59"/>
-          <p:cNvSpPr txBox="1"/>
-          <p:nvPr/>
-        </p:nvSpPr>
-        <p:spPr>
-          <a:xfrm>
-            <a:off x="10098786" y="4937760"/>
-            <a:ext cx="1452829" cy="182880"/>
-          </a:xfrm>
-          <a:prstGeom prst="rect">
-            <a:avLst/>
-          </a:prstGeom>
-          <a:noFill/>
-          <a:ln/>
-        </p:spPr>
-        <p:txBody>
-          <a:bodyPr wrap="square" lIns="0" tIns="0" rIns="0" bIns="0" rtlCol="0" anchor="t"/>
-          <a:lstStyle/>
-          <a:p>
-            <a:pPr indent="0" marL="0">
-              <a:buNone/>
-            </a:pPr>
-            <a:r>
-              <a:rPr lang="en-US" sz="750" b="1" spc="150" kern="0" dirty="0">
-                <a:solidFill>
-                  <a:srgbClr val="B8E62E"/>
-                </a:solidFill>
-                <a:latin typeface="Plus Jakarta Sans" pitchFamily="34" charset="0"/>
-                <a:ea typeface="Plus Jakarta Sans" pitchFamily="34" charset="-122"/>
-                <a:cs typeface="Plus Jakarta Sans" pitchFamily="34" charset="-120"/>
-              </a:rPr>
-              <a:t>WITH BOD APP</a:t>
-            </a:r>
-            <a:endParaRPr lang="en-US" sz="750" dirty="0"/>
-          </a:p>
-        </p:txBody>
-      </p:sp>
-      <p:sp>
-        <p:nvSpPr>
-          <p:cNvPr id="63" name="Text 60"/>
-          <p:cNvSpPr txBox="1"/>
-          <p:nvPr/>
-        </p:nvSpPr>
-        <p:spPr>
-          <a:xfrm>
-            <a:off x="10098786" y="5148072"/>
-            <a:ext cx="1407109" cy="1005840"/>
-          </a:xfrm>
-          <a:prstGeom prst="rect">
-            <a:avLst/>
-          </a:prstGeom>
-          <a:noFill/>
-          <a:ln/>
-        </p:spPr>
-        <p:txBody>
-          <a:bodyPr wrap="square" lIns="0" tIns="0" rIns="0" bIns="0" rtlCol="0" anchor="t"/>
-          <a:lstStyle/>
-          <a:p>
-            <a:pPr indent="0" marL="0">
-              <a:lnSpc>
-                <a:spcPct val="112000"/>
-              </a:lnSpc>
-              <a:buNone/>
-            </a:pPr>
-            <a:r>
-              <a:rPr lang="en-US" sz="1150" b="1" dirty="0">
-                <a:solidFill>
-                  <a:srgbClr val="F4F6F5"/>
-                </a:solidFill>
-                <a:latin typeface="Manrope" pitchFamily="34" charset="0"/>
-                <a:ea typeface="Manrope" pitchFamily="34" charset="-122"/>
-                <a:cs typeface="Manrope" pitchFamily="34" charset="-120"/>
-              </a:rPr>
-              <a:t>Finance sees the list, bills it, closes it.</a:t>
-            </a:r>
-            <a:endParaRPr lang="en-US" sz="1150" dirty="0"/>
-          </a:p>
-        </p:txBody>
-      </p:sp>
-      <p:sp>
-        <p:nvSpPr>
-          <p:cNvPr id="64" name="Text 61"/>
-          <p:cNvSpPr txBox="1"/>
-          <p:nvPr/>
-        </p:nvSpPr>
-        <p:spPr>
-          <a:xfrm>
-            <a:off x="548640" y="6446520"/>
-            <a:ext cx="6400800" cy="201168"/>
-          </a:xfrm>
-          <a:prstGeom prst="rect">
-            <a:avLst/>
-          </a:prstGeom>
-          <a:noFill/>
-          <a:ln/>
-        </p:spPr>
-        <p:txBody>
-          <a:bodyPr wrap="square" lIns="0" tIns="0" rIns="0" bIns="0" rtlCol="0" anchor="t"/>
-          <a:lstStyle/>
-          <a:p>
-            <a:pPr indent="0" marL="0">
-              <a:buNone/>
-            </a:pPr>
-            <a:r>
-              <a:rPr lang="en-US" sz="800" b="1" spc="200" kern="0" dirty="0">
+              <a:rPr lang="en-US" sz="1000" b="1" spc="200" kern="0" dirty="0">
                 <a:solidFill>
                   <a:srgbClr val="6B7773"/>
                 </a:solidFill>
@@ -4102,7 +3078,46 @@
               </a:rPr>
               <a:t>BOD APP  ·  THE TASK APP FOR CREATIVE AGENCIES</a:t>
             </a:r>
-            <a:endParaRPr lang="en-US" sz="800" dirty="0"/>
+            <a:endParaRPr lang="en-US" sz="1000" dirty="0"/>
+          </a:p>
+        </p:txBody>
+      </p:sp>
+      <p:sp>
+        <p:nvSpPr>
+          <p:cNvPr id="36" name="Text 28"/>
+          <p:cNvSpPr txBox="1"/>
+          <p:nvPr/>
+        </p:nvSpPr>
+        <p:spPr>
+          <a:xfrm>
+            <a:off x="10591495" y="6355080"/>
+            <a:ext cx="914400" cy="201168"/>
+          </a:xfrm>
+          <a:prstGeom prst="rect">
+            <a:avLst/>
+          </a:prstGeom>
+          <a:noFill/>
+          <a:ln/>
+        </p:spPr>
+        <p:txBody>
+          <a:bodyPr wrap="square" lIns="0" tIns="0" rIns="0" bIns="0" rtlCol="0" anchor="t"/>
+          <a:lstStyle/>
+          <a:p>
+            <a:pPr algn="r" indent="0" marL="0">
+              <a:buNone/>
+            </a:pPr>
+            <a:r>
+              <a:rPr lang="en-US" sz="1000" b="1" dirty="0">
+                <a:solidFill>
+                  <a:srgbClr val="6B7773"/>
+                </a:solidFill>
+                <a:latin typeface="Plus Jakarta Sans" pitchFamily="34" charset="0"/>
+                <a:ea typeface="Plus Jakarta Sans" pitchFamily="34" charset="-122"/>
+                <a:cs typeface="Plus Jakarta Sans" pitchFamily="34" charset="-120"/>
+              </a:rPr>
+              <a:t>11</a:t>
+            </a:r>
+            <a:endParaRPr lang="en-US" sz="1000" dirty="0"/>
           </a:p>
         </p:txBody>
       </p:sp>

--- a/bod-app-sales-deck/samples/Bod-App-Sample-Slides.pptx
+++ b/bod-app-sales-deck/samples/Bod-App-Sample-Slides.pptx
@@ -8,9 +8,10 @@
     <p:sldId id="256" r:id="rId2"/>
     <p:sldId id="257" r:id="rId3"/>
     <p:sldId id="258" r:id="rId4"/>
+    <p:sldId id="259" r:id="rId5"/>
   </p:sldIdLst>
   <p:notesMasterIdLst>
-    <p:notesMasterId r:id="rId5"/>
+    <p:notesMasterId r:id="rId6"/>
   </p:notesMasterIdLst>
   <p:sldSz cx="12192000" cy="6858000"/>
   <p:notesSz cx="6858000" cy="12192000"/>
@@ -592,7 +593,7 @@
           <a:p>
             <a:r>
               <a:rPr lang="en-US" dirty="0"/>
-              <a:t>This is the follow-up nudge. It appears once a task has waited on a client for two days.</a:t>
+              <a:t>The follow-up nudge appears when a task has been waiting on a client. Each team sets how long that is.</a:t>
             </a:r>
             <a:endParaRPr lang="en-US" dirty="0"/>
           </a:p>
@@ -680,7 +681,7 @@
           <a:p>
             <a:r>
               <a:rPr lang="en-US" dirty="0"/>
-              <a:t>Usually: briefs arrive on WhatsApp at 11 pm, nobody knows who owns what, status lives in people's heads, the client goes quiet for three days, and finished work sits unbilled. With Bod App each of those steps is handled.</a:t>
+              <a:t>Usually: briefs arrive on WhatsApp late at night, nobody knows who owns what, status lives in people's heads, the client goes quiet, and finished work sits unbilled. With Bod App each of those steps is handled.</a:t>
             </a:r>
             <a:endParaRPr lang="en-US" dirty="0"/>
           </a:p>
@@ -704,6 +705,94 @@
             <a:fld id="{F7021451-1387-4CA6-816F-3879F97B5CBC}" type="slidenum">
               <a:rPr lang="en-US"/>
               <a:t>3</a:t>
+            </a:fld>
+            <a:endParaRPr lang="en-US"/>
+          </a:p>
+        </p:txBody>
+      </p:sp>
+    </p:spTree>
+    <p:extLst>
+      <p:ext uri="{BB962C8B-B14F-4D97-AF65-F5344CB8AC3E}">
+        <p14:creationId xmlns:p14="http://schemas.microsoft.com/office/powerpoint/2010/main" val="1024086991"/>
+      </p:ext>
+    </p:extLst>
+  </p:cSld>
+  <p:clrMapOvr>
+    <a:masterClrMapping/>
+  </p:clrMapOvr>
+</p:notes>
+</file>
+
+<file path=ppt/notesSlides/notesSlide4.xml><?xml version="1.0" encoding="utf-8"?>
+<p:notes xmlns:a="http://schemas.openxmlformats.org/drawingml/2006/main" xmlns:r="http://schemas.openxmlformats.org/officeDocument/2006/relationships" xmlns:p="http://schemas.openxmlformats.org/presentationml/2006/main">
+  <p:cSld>
+    <p:spTree>
+      <p:nvGrpSpPr>
+        <p:cNvPr id="1" name=""/>
+        <p:cNvGrpSpPr/>
+        <p:nvPr/>
+      </p:nvGrpSpPr>
+      <p:grpSpPr>
+        <a:xfrm>
+          <a:off x="0" y="0"/>
+          <a:ext cx="0" cy="0"/>
+          <a:chOff x="0" y="0"/>
+          <a:chExt cx="0" cy="0"/>
+        </a:xfrm>
+      </p:grpSpPr>
+      <p:sp>
+        <p:nvSpPr>
+          <p:cNvPr id="2" name="Slide Image Placeholder 1"/>
+          <p:cNvSpPr>
+            <a:spLocks noGrp="1" noRot="1" noChangeAspect="1"/>
+          </p:cNvSpPr>
+          <p:nvPr>
+            <p:ph type="sldImg"/>
+          </p:nvPr>
+        </p:nvSpPr>
+        <p:spPr/>
+      </p:sp>
+      <p:sp>
+        <p:nvSpPr>
+          <p:cNvPr id="3" name="Notes Placeholder 2"/>
+          <p:cNvSpPr>
+            <a:spLocks noGrp="1"/>
+          </p:cNvSpPr>
+          <p:nvPr>
+            <p:ph type="body" idx="1"/>
+          </p:nvPr>
+        </p:nvSpPr>
+        <p:spPr/>
+        <p:txBody>
+          <a:bodyPr/>
+          <a:lstStyle/>
+          <a:p>
+            <a:r>
+              <a:rPr lang="en-US" dirty="0"/>
+              <a:t>Close by offering the walkthrough, not the sale.</a:t>
+            </a:r>
+            <a:endParaRPr lang="en-US" dirty="0"/>
+          </a:p>
+        </p:txBody>
+      </p:sp>
+      <p:sp>
+        <p:nvSpPr>
+          <p:cNvPr id="4" name="Slide Number Placeholder 3"/>
+          <p:cNvSpPr>
+            <a:spLocks noGrp="1"/>
+          </p:cNvSpPr>
+          <p:nvPr>
+            <p:ph type="sldNum" sz="quarter" idx="10"/>
+          </p:nvPr>
+        </p:nvSpPr>
+        <p:spPr/>
+        <p:txBody>
+          <a:bodyPr/>
+          <a:lstStyle/>
+          <a:p>
+            <a:fld id="{F7021451-1387-4CA6-816F-3879F97B5CBC}" type="slidenum">
+              <a:rPr lang="en-US"/>
+              <a:t>4</a:t>
             </a:fld>
             <a:endParaRPr lang="en-US"/>
           </a:p>
@@ -1293,7 +1382,7 @@
                 <a:ea typeface="Plus Jakarta Sans" pitchFamily="34" charset="-122"/>
                 <a:cs typeface="Plus Jakarta Sans" pitchFamily="34" charset="-120"/>
               </a:rPr>
-              <a:t>MYBODSTUDIO.COM</a:t>
+              <a:t>BODSTUDIO.COM</a:t>
             </a:r>
             <a:endParaRPr lang="en-US" sz="1000" dirty="0"/>
           </a:p>
@@ -1355,12 +1444,12 @@
         </p:nvSpPr>
         <p:spPr>
           <a:xfrm>
-            <a:off x="6998854" y="2788920"/>
-            <a:ext cx="2377440" cy="713232"/>
+            <a:off x="7159841" y="2793291"/>
+            <a:ext cx="2167235" cy="795528"/>
           </a:xfrm>
           <a:prstGeom prst="roundRect">
             <a:avLst>
-              <a:gd name="adj" fmla="val 25641"/>
+              <a:gd name="adj" fmla="val 20690"/>
             </a:avLst>
           </a:prstGeom>
           <a:solidFill>
@@ -1377,8 +1466,8 @@
         </p:nvSpPr>
         <p:spPr>
           <a:xfrm rot="10800000">
-            <a:off x="7638934" y="3493008"/>
-            <a:ext cx="219456" cy="175565"/>
+            <a:off x="7474416" y="3579675"/>
+            <a:ext cx="237744" cy="182880"/>
           </a:xfrm>
           <a:prstGeom prst="triangle">
             <a:avLst/>
@@ -1397,8 +1486,8 @@
         </p:nvSpPr>
         <p:spPr>
           <a:xfrm>
-            <a:off x="7227454" y="2788920"/>
-            <a:ext cx="1920240" cy="713232"/>
+            <a:off x="7397585" y="2957883"/>
+            <a:ext cx="1691747" cy="466344"/>
           </a:xfrm>
           <a:prstGeom prst="rect">
             <a:avLst/>
@@ -1412,7 +1501,7 @@
           <a:p>
             <a:pPr indent="0" marL="0">
               <a:lnSpc>
-                <a:spcPct val="110000"/>
+                <a:spcPts val="1840"/>
               </a:lnSpc>
               <a:buNone/>
             </a:pPr>
@@ -1425,7 +1514,27 @@
                 <a:ea typeface="Manrope" pitchFamily="34" charset="-122"/>
                 <a:cs typeface="Manrope" pitchFamily="34" charset="-120"/>
               </a:rPr>
-              <a:t>Come in. Let me show you around.</a:t>
+              <a:t>Come in. Let me</a:t>
+            </a:r>
+            <a:endParaRPr lang="en-US" sz="1500" dirty="0"/>
+          </a:p>
+          <a:p>
+            <a:pPr indent="0" marL="0">
+              <a:lnSpc>
+                <a:spcPts val="1840"/>
+              </a:lnSpc>
+              <a:buNone/>
+            </a:pPr>
+            <a:r>
+              <a:rPr lang="en-US" sz="1500" b="1" dirty="0">
+                <a:solidFill>
+                  <a:srgbClr val="0B0D0C"/>
+                </a:solidFill>
+                <a:latin typeface="Manrope" pitchFamily="34" charset="0"/>
+                <a:ea typeface="Manrope" pitchFamily="34" charset="-122"/>
+                <a:cs typeface="Manrope" pitchFamily="34" charset="-120"/>
+              </a:rPr>
+              <a:t>show you around.</a:t>
             </a:r>
             <a:endParaRPr lang="en-US" sz="1500" dirty="0"/>
           </a:p>
@@ -1520,7 +1629,7 @@
                 <a:ea typeface="Plus Jakarta Sans" pitchFamily="34" charset="-122"/>
                 <a:cs typeface="Plus Jakarta Sans" pitchFamily="34" charset="-120"/>
               </a:rPr>
-              <a:t>3 PM</a:t>
+              <a:t>FOLLOW-UPS</a:t>
             </a:r>
             <a:endParaRPr lang="en-US" sz="1000" dirty="0"/>
           </a:p>
@@ -1596,7 +1705,7 @@
         </p:nvSpPr>
         <p:spPr>
           <a:xfrm>
-            <a:off x="685800" y="2560320"/>
+            <a:off x="685800" y="2468880"/>
             <a:ext cx="4375023" cy="777240"/>
           </a:xfrm>
           <a:prstGeom prst="rect">
@@ -1624,7 +1733,7 @@
                 <a:ea typeface="Manrope" pitchFamily="34" charset="-122"/>
                 <a:cs typeface="Manrope" pitchFamily="34" charset="-120"/>
               </a:rPr>
-              <a:t>After two days of waiting, Bod App drafts the follow-up. You just send it.</a:t>
+              <a:t>Bod App notices, and drafts the follow-up for you. You just send it.</a:t>
             </a:r>
             <a:endParaRPr lang="en-US" sz="1800" dirty="0"/>
           </a:p>
@@ -1646,8 +1755,8 @@
         </p:blipFill>
         <p:spPr>
           <a:xfrm>
-            <a:off x="548640" y="3931920"/>
-            <a:ext cx="2225942" cy="2240280"/>
+            <a:off x="594360" y="4434840"/>
+            <a:ext cx="1726241" cy="1737360"/>
           </a:xfrm>
           <a:prstGeom prst="rect">
             <a:avLst/>
@@ -1662,12 +1771,12 @@
         </p:nvSpPr>
         <p:spPr>
           <a:xfrm>
-            <a:off x="3094622" y="4251960"/>
-            <a:ext cx="2514600" cy="777240"/>
+            <a:off x="368752" y="3456121"/>
+            <a:ext cx="2814816" cy="795528"/>
           </a:xfrm>
           <a:prstGeom prst="roundRect">
             <a:avLst>
-              <a:gd name="adj" fmla="val 23529"/>
+              <a:gd name="adj" fmla="val 20690"/>
             </a:avLst>
           </a:prstGeom>
           <a:solidFill>
@@ -1683,9 +1792,9 @@
           <p:nvPr/>
         </p:nvSpPr>
         <p:spPr>
-          <a:xfrm rot="16200000">
-            <a:off x="2928201" y="4530852"/>
-            <a:ext cx="219456" cy="175565"/>
+          <a:xfrm rot="10800000">
+            <a:off x="1150621" y="4242505"/>
+            <a:ext cx="237744" cy="182880"/>
           </a:xfrm>
           <a:prstGeom prst="triangle">
             <a:avLst/>
@@ -1704,8 +1813,8 @@
         </p:nvSpPr>
         <p:spPr>
           <a:xfrm>
-            <a:off x="3323222" y="4251960"/>
-            <a:ext cx="2057400" cy="777240"/>
+            <a:off x="606496" y="3620713"/>
+            <a:ext cx="2339328" cy="466344"/>
           </a:xfrm>
           <a:prstGeom prst="rect">
             <a:avLst/>
@@ -1719,7 +1828,7 @@
           <a:p>
             <a:pPr indent="0" marL="0">
               <a:lnSpc>
-                <a:spcPct val="110000"/>
+                <a:spcPts val="1840"/>
               </a:lnSpc>
               <a:buNone/>
             </a:pPr>
@@ -1732,7 +1841,27 @@
                 <a:ea typeface="Manrope" pitchFamily="34" charset="-122"/>
                 <a:cs typeface="Manrope" pitchFamily="34" charset="-120"/>
               </a:rPr>
-              <a:t>Two days, no reply. I've written it for you.</a:t>
+              <a:t>No reply yet? I've written</a:t>
+            </a:r>
+            <a:endParaRPr lang="en-US" sz="1500" dirty="0"/>
+          </a:p>
+          <a:p>
+            <a:pPr indent="0" marL="0">
+              <a:lnSpc>
+                <a:spcPts val="1840"/>
+              </a:lnSpc>
+              <a:buNone/>
+            </a:pPr>
+            <a:r>
+              <a:rPr lang="en-US" sz="1500" b="1" dirty="0">
+                <a:solidFill>
+                  <a:srgbClr val="0B0D0C"/>
+                </a:solidFill>
+                <a:latin typeface="Manrope" pitchFamily="34" charset="0"/>
+                <a:ea typeface="Manrope" pitchFamily="34" charset="-122"/>
+                <a:cs typeface="Manrope" pitchFamily="34" charset="-120"/>
+              </a:rPr>
+              <a:t>the follow-up for you.</a:t>
             </a:r>
             <a:endParaRPr lang="en-US" sz="1500" dirty="0"/>
           </a:p>
@@ -2757,7 +2886,7 @@
                 <a:ea typeface="Manrope" pitchFamily="34" charset="-122"/>
                 <a:cs typeface="Manrope" pitchFamily="34" charset="-120"/>
               </a:rPr>
-              <a:t>Quiet for two days? It follows up.</a:t>
+              <a:t>Gone quiet? It drafts the follow-up.</a:t>
             </a:r>
             <a:endParaRPr lang="en-US" sz="1500" dirty="0"/>
           </a:p>
@@ -2951,8 +3080,8 @@
         </p:blipFill>
         <p:spPr>
           <a:xfrm>
-            <a:off x="10062670" y="594360"/>
-            <a:ext cx="1443225" cy="1737360"/>
+            <a:off x="10134419" y="548640"/>
+            <a:ext cx="1481205" cy="1783080"/>
           </a:xfrm>
           <a:prstGeom prst="rect">
             <a:avLst/>
@@ -2967,12 +3096,12 @@
         </p:nvSpPr>
         <p:spPr>
           <a:xfrm>
-            <a:off x="7273750" y="1005840"/>
-            <a:ext cx="2514600" cy="731520"/>
+            <a:off x="7580991" y="803483"/>
+            <a:ext cx="2497872" cy="795528"/>
           </a:xfrm>
           <a:prstGeom prst="roundRect">
             <a:avLst>
-              <a:gd name="adj" fmla="val 25000"/>
+              <a:gd name="adj" fmla="val 20690"/>
             </a:avLst>
           </a:prstGeom>
           <a:solidFill>
@@ -2989,8 +3118,8 @@
         </p:nvSpPr>
         <p:spPr>
           <a:xfrm rot="5400000">
-            <a:off x="9779206" y="1261872"/>
-            <a:ext cx="219456" cy="175565"/>
+            <a:off x="10042287" y="1082375"/>
+            <a:ext cx="237744" cy="182880"/>
           </a:xfrm>
           <a:prstGeom prst="triangle">
             <a:avLst/>
@@ -3009,8 +3138,8 @@
         </p:nvSpPr>
         <p:spPr>
           <a:xfrm>
-            <a:off x="7502350" y="1005840"/>
-            <a:ext cx="2057400" cy="731520"/>
+            <a:off x="7818735" y="968075"/>
+            <a:ext cx="2022384" cy="466344"/>
           </a:xfrm>
           <a:prstGeom prst="rect">
             <a:avLst/>
@@ -3024,7 +3153,7 @@
           <a:p>
             <a:pPr indent="0" marL="0">
               <a:lnSpc>
-                <a:spcPct val="110000"/>
+                <a:spcPts val="1840"/>
               </a:lnSpc>
               <a:buNone/>
             </a:pPr>
@@ -3037,7 +3166,27 @@
                 <a:ea typeface="Manrope" pitchFamily="34" charset="-122"/>
                 <a:cs typeface="Manrope" pitchFamily="34" charset="-120"/>
               </a:rPr>
-              <a:t>Every job, same path. I watch every step.</a:t>
+              <a:t>Every job, same path.</a:t>
+            </a:r>
+            <a:endParaRPr lang="en-US" sz="1500" dirty="0"/>
+          </a:p>
+          <a:p>
+            <a:pPr indent="0" marL="0">
+              <a:lnSpc>
+                <a:spcPts val="1840"/>
+              </a:lnSpc>
+              <a:buNone/>
+            </a:pPr>
+            <a:r>
+              <a:rPr lang="en-US" sz="1500" b="1" dirty="0">
+                <a:solidFill>
+                  <a:srgbClr val="0B0D0C"/>
+                </a:solidFill>
+                <a:latin typeface="Manrope" pitchFamily="34" charset="0"/>
+                <a:ea typeface="Manrope" pitchFamily="34" charset="-122"/>
+                <a:cs typeface="Manrope" pitchFamily="34" charset="-120"/>
+              </a:rPr>
+              <a:t>I watch every step.</a:t>
             </a:r>
             <a:endParaRPr lang="en-US" sz="1500" dirty="0"/>
           </a:p>
@@ -3115,9 +3264,693 @@
                 <a:ea typeface="Plus Jakarta Sans" pitchFamily="34" charset="-122"/>
                 <a:cs typeface="Plus Jakarta Sans" pitchFamily="34" charset="-120"/>
               </a:rPr>
-              <a:t>11</a:t>
+              <a:t>03</a:t>
             </a:r>
             <a:endParaRPr lang="en-US" sz="1000" dirty="0"/>
+          </a:p>
+        </p:txBody>
+      </p:sp>
+    </p:spTree>
+  </p:cSld>
+  <p:clrMapOvr>
+    <a:masterClrMapping/>
+  </p:clrMapOvr>
+</p:sld>
+</file>
+
+<file path=ppt/slides/slide4.xml><?xml version="1.0" encoding="utf-8"?>
+<p:sld xmlns:a="http://schemas.openxmlformats.org/drawingml/2006/main" xmlns:r="http://schemas.openxmlformats.org/officeDocument/2006/relationships" xmlns:p="http://schemas.openxmlformats.org/presentationml/2006/main">
+  <p:cSld name="Slide 4">
+    <p:bg>
+      <p:bgPr>
+        <a:solidFill>
+          <a:srgbClr val="0B0D0C"/>
+        </a:solidFill>
+      </p:bgPr>
+    </p:bg>
+    <p:spTree>
+      <p:nvGrpSpPr>
+        <p:cNvPr id="1" name=""/>
+        <p:cNvGrpSpPr/>
+        <p:nvPr/>
+      </p:nvGrpSpPr>
+      <p:grpSpPr>
+        <a:xfrm>
+          <a:off x="0" y="0"/>
+          <a:ext cx="0" cy="0"/>
+          <a:chOff x="0" y="0"/>
+          <a:chExt cx="0" cy="0"/>
+        </a:xfrm>
+      </p:grpSpPr>
+      <p:pic>
+        <p:nvPicPr>
+          <p:cNvPr id="2" name="Image 0" descr="/tmp/claude-0/-home-user-Claude-Works/c609e3f7-e17f-5f43-8424-4df30cb9a6a9/scratchpad/build/s/img/glow.png">    </p:cNvPr>
+          <p:cNvPicPr>
+            <a:picLocks noChangeAspect="1"/>
+          </p:cNvPicPr>
+          <p:nvPr/>
+        </p:nvPicPr>
+        <p:blipFill>
+          <a:blip r:embed="rId1"/>
+          <a:stretch>
+            <a:fillRect/>
+          </a:stretch>
+        </p:blipFill>
+        <p:spPr>
+          <a:xfrm>
+            <a:off x="6763936" y="-548640"/>
+            <a:ext cx="6936520" cy="6936520"/>
+          </a:xfrm>
+          <a:prstGeom prst="rect">
+            <a:avLst/>
+          </a:prstGeom>
+        </p:spPr>
+      </p:pic>
+      <p:sp>
+        <p:nvSpPr>
+          <p:cNvPr id="3" name="Text 0"/>
+          <p:cNvSpPr txBox="1"/>
+          <p:nvPr/>
+        </p:nvSpPr>
+        <p:spPr>
+          <a:xfrm>
+            <a:off x="685800" y="640080"/>
+            <a:ext cx="3657600" cy="201168"/>
+          </a:xfrm>
+          <a:prstGeom prst="rect">
+            <a:avLst/>
+          </a:prstGeom>
+          <a:noFill/>
+          <a:ln/>
+        </p:spPr>
+        <p:txBody>
+          <a:bodyPr wrap="square" lIns="0" tIns="0" rIns="0" bIns="0" rtlCol="0" anchor="t"/>
+          <a:lstStyle/>
+          <a:p>
+            <a:pPr indent="0" marL="0">
+              <a:buNone/>
+            </a:pPr>
+            <a:r>
+              <a:rPr lang="en-US" sz="1000" b="1" spc="200" kern="0" dirty="0">
+                <a:solidFill>
+                  <a:srgbClr val="B8E62E"/>
+                </a:solidFill>
+                <a:latin typeface="Plus Jakarta Sans" pitchFamily="34" charset="0"/>
+                <a:ea typeface="Plus Jakarta Sans" pitchFamily="34" charset="-122"/>
+                <a:cs typeface="Plus Jakarta Sans" pitchFamily="34" charset="-120"/>
+              </a:rPr>
+              <a:t>LET'S TALK</a:t>
+            </a:r>
+            <a:endParaRPr lang="en-US" sz="1000" dirty="0"/>
+          </a:p>
+        </p:txBody>
+      </p:sp>
+      <p:sp>
+        <p:nvSpPr>
+          <p:cNvPr id="4" name="Text 1"/>
+          <p:cNvSpPr txBox="1"/>
+          <p:nvPr/>
+        </p:nvSpPr>
+        <p:spPr>
+          <a:xfrm>
+            <a:off x="685800" y="1005840"/>
+            <a:ext cx="6216472" cy="1417320"/>
+          </a:xfrm>
+          <a:prstGeom prst="rect">
+            <a:avLst/>
+          </a:prstGeom>
+          <a:noFill/>
+          <a:ln/>
+        </p:spPr>
+        <p:txBody>
+          <a:bodyPr wrap="square" lIns="0" tIns="0" rIns="0" bIns="0" rtlCol="0" anchor="t"/>
+          <a:lstStyle/>
+          <a:p>
+            <a:pPr indent="0" marL="0">
+              <a:lnSpc>
+                <a:spcPct val="100000"/>
+              </a:lnSpc>
+              <a:buNone/>
+            </a:pPr>
+            <a:r>
+              <a:rPr lang="en-US" sz="4400" b="1" dirty="0">
+                <a:solidFill>
+                  <a:srgbClr val="F4F6F5"/>
+                </a:solidFill>
+                <a:latin typeface="Epilogue" pitchFamily="34" charset="0"/>
+                <a:ea typeface="Epilogue" pitchFamily="34" charset="-122"/>
+                <a:cs typeface="Epilogue" pitchFamily="34" charset="-120"/>
+              </a:rPr>
+              <a:t>Come see</a:t>
+            </a:r>
+            <a:endParaRPr lang="en-US" sz="4400" dirty="0"/>
+          </a:p>
+          <a:p>
+            <a:pPr indent="0" marL="0">
+              <a:lnSpc>
+                <a:spcPct val="100000"/>
+              </a:lnSpc>
+              <a:buNone/>
+            </a:pPr>
+            <a:r>
+              <a:rPr lang="en-US" sz="4400" b="1" dirty="0">
+                <a:solidFill>
+                  <a:srgbClr val="F4F6F5"/>
+                </a:solidFill>
+                <a:latin typeface="Epilogue" pitchFamily="34" charset="0"/>
+                <a:ea typeface="Epilogue" pitchFamily="34" charset="-122"/>
+                <a:cs typeface="Epilogue" pitchFamily="34" charset="-120"/>
+              </a:rPr>
+              <a:t>how it feels.</a:t>
+            </a:r>
+            <a:endParaRPr lang="en-US" sz="4400" dirty="0"/>
+          </a:p>
+        </p:txBody>
+      </p:sp>
+      <p:sp>
+        <p:nvSpPr>
+          <p:cNvPr id="5" name="Text 2"/>
+          <p:cNvSpPr txBox="1"/>
+          <p:nvPr/>
+        </p:nvSpPr>
+        <p:spPr>
+          <a:xfrm>
+            <a:off x="685800" y="2468880"/>
+            <a:ext cx="5295748" cy="411480"/>
+          </a:xfrm>
+          <a:prstGeom prst="rect">
+            <a:avLst/>
+          </a:prstGeom>
+          <a:noFill/>
+          <a:ln/>
+        </p:spPr>
+        <p:txBody>
+          <a:bodyPr wrap="square" lIns="0" tIns="0" rIns="0" bIns="0" rtlCol="0" anchor="t"/>
+          <a:lstStyle/>
+          <a:p>
+            <a:pPr indent="0" marL="0">
+              <a:buNone/>
+            </a:pPr>
+            <a:r>
+              <a:rPr lang="en-US" sz="1800" dirty="0">
+                <a:solidFill>
+                  <a:srgbClr val="9AA7A2"/>
+                </a:solidFill>
+                <a:latin typeface="Manrope" pitchFamily="34" charset="0"/>
+                <a:ea typeface="Manrope" pitchFamily="34" charset="-122"/>
+                <a:cs typeface="Manrope" pitchFamily="34" charset="-120"/>
+              </a:rPr>
+              <a:t>A 20-minute walkthrough on your own workflow.</a:t>
+            </a:r>
+            <a:endParaRPr lang="en-US" sz="1800" dirty="0"/>
+          </a:p>
+        </p:txBody>
+      </p:sp>
+      <p:sp>
+        <p:nvSpPr>
+          <p:cNvPr id="6" name="Text 3"/>
+          <p:cNvSpPr txBox="1"/>
+          <p:nvPr/>
+        </p:nvSpPr>
+        <p:spPr>
+          <a:xfrm>
+            <a:off x="685800" y="3429000"/>
+            <a:ext cx="5295748" cy="594360"/>
+          </a:xfrm>
+          <a:prstGeom prst="rect">
+            <a:avLst/>
+          </a:prstGeom>
+          <a:noFill/>
+          <a:ln/>
+        </p:spPr>
+        <p:txBody>
+          <a:bodyPr wrap="square" lIns="0" tIns="0" rIns="0" bIns="0" rtlCol="0" anchor="t"/>
+          <a:lstStyle/>
+          <a:p>
+            <a:pPr indent="0" marL="0">
+              <a:buNone/>
+            </a:pPr>
+            <a:r>
+              <a:rPr lang="en-US" sz="3600" b="1" dirty="0">
+                <a:solidFill>
+                  <a:srgbClr val="B8E62E"/>
+                </a:solidFill>
+                <a:latin typeface="Epilogue" pitchFamily="34" charset="0"/>
+                <a:ea typeface="Epilogue" pitchFamily="34" charset="-122"/>
+                <a:cs typeface="Epilogue" pitchFamily="34" charset="-120"/>
+              </a:rPr>
+              <a:t>bodstudio.com</a:t>
+            </a:r>
+            <a:endParaRPr lang="en-US" sz="3600" dirty="0"/>
+          </a:p>
+        </p:txBody>
+      </p:sp>
+      <p:sp>
+        <p:nvSpPr>
+          <p:cNvPr id="7" name="Text 4"/>
+          <p:cNvSpPr txBox="1"/>
+          <p:nvPr/>
+        </p:nvSpPr>
+        <p:spPr>
+          <a:xfrm>
+            <a:off x="685800" y="4306824"/>
+            <a:ext cx="1097280" cy="201168"/>
+          </a:xfrm>
+          <a:prstGeom prst="rect">
+            <a:avLst/>
+          </a:prstGeom>
+          <a:noFill/>
+          <a:ln/>
+        </p:spPr>
+        <p:txBody>
+          <a:bodyPr wrap="square" lIns="0" tIns="0" rIns="0" bIns="0" rtlCol="0" anchor="t"/>
+          <a:lstStyle/>
+          <a:p>
+            <a:pPr indent="0" marL="0">
+              <a:buNone/>
+            </a:pPr>
+            <a:r>
+              <a:rPr lang="en-US" sz="1000" b="1" spc="200" kern="0" dirty="0">
+                <a:solidFill>
+                  <a:srgbClr val="6B7773"/>
+                </a:solidFill>
+                <a:latin typeface="Plus Jakarta Sans" pitchFamily="34" charset="0"/>
+                <a:ea typeface="Plus Jakarta Sans" pitchFamily="34" charset="-122"/>
+                <a:cs typeface="Plus Jakarta Sans" pitchFamily="34" charset="-120"/>
+              </a:rPr>
+              <a:t>SALES</a:t>
+            </a:r>
+            <a:endParaRPr lang="en-US" sz="1000" dirty="0"/>
+          </a:p>
+        </p:txBody>
+      </p:sp>
+      <p:sp>
+        <p:nvSpPr>
+          <p:cNvPr id="8" name="Text 5"/>
+          <p:cNvSpPr txBox="1"/>
+          <p:nvPr/>
+        </p:nvSpPr>
+        <p:spPr>
+          <a:xfrm>
+            <a:off x="1874520" y="4251960"/>
+            <a:ext cx="4107028" cy="310896"/>
+          </a:xfrm>
+          <a:prstGeom prst="rect">
+            <a:avLst/>
+          </a:prstGeom>
+          <a:noFill/>
+          <a:ln/>
+        </p:spPr>
+        <p:txBody>
+          <a:bodyPr wrap="square" lIns="0" tIns="0" rIns="0" bIns="0" rtlCol="0" anchor="ctr"/>
+          <a:lstStyle/>
+          <a:p>
+            <a:pPr indent="0" marL="0">
+              <a:buNone/>
+            </a:pPr>
+            <a:r>
+              <a:rPr lang="en-US" sz="1800" b="1" dirty="0">
+                <a:solidFill>
+                  <a:srgbClr val="F4F6F5"/>
+                </a:solidFill>
+                <a:latin typeface="Manrope" pitchFamily="34" charset="0"/>
+                <a:ea typeface="Manrope" pitchFamily="34" charset="-122"/>
+                <a:cs typeface="Manrope" pitchFamily="34" charset="-120"/>
+              </a:rPr>
+              <a:t>+91 7356 333 965</a:t>
+            </a:r>
+            <a:endParaRPr lang="en-US" sz="1800" dirty="0"/>
+          </a:p>
+        </p:txBody>
+      </p:sp>
+      <p:sp>
+        <p:nvSpPr>
+          <p:cNvPr id="9" name="Text 6"/>
+          <p:cNvSpPr txBox="1"/>
+          <p:nvPr/>
+        </p:nvSpPr>
+        <p:spPr>
+          <a:xfrm>
+            <a:off x="685800" y="4764024"/>
+            <a:ext cx="1097280" cy="201168"/>
+          </a:xfrm>
+          <a:prstGeom prst="rect">
+            <a:avLst/>
+          </a:prstGeom>
+          <a:noFill/>
+          <a:ln/>
+        </p:spPr>
+        <p:txBody>
+          <a:bodyPr wrap="square" lIns="0" tIns="0" rIns="0" bIns="0" rtlCol="0" anchor="t"/>
+          <a:lstStyle/>
+          <a:p>
+            <a:pPr indent="0" marL="0">
+              <a:buNone/>
+            </a:pPr>
+            <a:r>
+              <a:rPr lang="en-US" sz="1000" b="1" spc="200" kern="0" dirty="0">
+                <a:solidFill>
+                  <a:srgbClr val="6B7773"/>
+                </a:solidFill>
+                <a:latin typeface="Plus Jakarta Sans" pitchFamily="34" charset="0"/>
+                <a:ea typeface="Plus Jakarta Sans" pitchFamily="34" charset="-122"/>
+                <a:cs typeface="Plus Jakarta Sans" pitchFamily="34" charset="-120"/>
+              </a:rPr>
+              <a:t>EMAIL</a:t>
+            </a:r>
+            <a:endParaRPr lang="en-US" sz="1000" dirty="0"/>
+          </a:p>
+        </p:txBody>
+      </p:sp>
+      <p:sp>
+        <p:nvSpPr>
+          <p:cNvPr id="10" name="Text 7"/>
+          <p:cNvSpPr txBox="1"/>
+          <p:nvPr/>
+        </p:nvSpPr>
+        <p:spPr>
+          <a:xfrm>
+            <a:off x="1874520" y="4709160"/>
+            <a:ext cx="4107028" cy="310896"/>
+          </a:xfrm>
+          <a:prstGeom prst="rect">
+            <a:avLst/>
+          </a:prstGeom>
+          <a:noFill/>
+          <a:ln/>
+        </p:spPr>
+        <p:txBody>
+          <a:bodyPr wrap="square" lIns="0" tIns="0" rIns="0" bIns="0" rtlCol="0" anchor="ctr"/>
+          <a:lstStyle/>
+          <a:p>
+            <a:pPr indent="0" marL="0">
+              <a:buNone/>
+            </a:pPr>
+            <a:r>
+              <a:rPr lang="en-US" sz="1800" b="1" dirty="0">
+                <a:solidFill>
+                  <a:srgbClr val="F4F6F5"/>
+                </a:solidFill>
+                <a:latin typeface="Manrope" pitchFamily="34" charset="0"/>
+                <a:ea typeface="Manrope" pitchFamily="34" charset="-122"/>
+                <a:cs typeface="Manrope" pitchFamily="34" charset="-120"/>
+              </a:rPr>
+              <a:t>info@storibodcreatives.com</a:t>
+            </a:r>
+            <a:endParaRPr lang="en-US" sz="1800" dirty="0"/>
+          </a:p>
+        </p:txBody>
+      </p:sp>
+      <p:sp>
+        <p:nvSpPr>
+          <p:cNvPr id="11" name="Text 8"/>
+          <p:cNvSpPr txBox="1"/>
+          <p:nvPr/>
+        </p:nvSpPr>
+        <p:spPr>
+          <a:xfrm>
+            <a:off x="685800" y="5221224"/>
+            <a:ext cx="1097280" cy="201168"/>
+          </a:xfrm>
+          <a:prstGeom prst="rect">
+            <a:avLst/>
+          </a:prstGeom>
+          <a:noFill/>
+          <a:ln/>
+        </p:spPr>
+        <p:txBody>
+          <a:bodyPr wrap="square" lIns="0" tIns="0" rIns="0" bIns="0" rtlCol="0" anchor="t"/>
+          <a:lstStyle/>
+          <a:p>
+            <a:pPr indent="0" marL="0">
+              <a:buNone/>
+            </a:pPr>
+            <a:r>
+              <a:rPr lang="en-US" sz="1000" b="1" spc="200" kern="0" dirty="0">
+                <a:solidFill>
+                  <a:srgbClr val="6B7773"/>
+                </a:solidFill>
+                <a:latin typeface="Plus Jakarta Sans" pitchFamily="34" charset="0"/>
+                <a:ea typeface="Plus Jakarta Sans" pitchFamily="34" charset="-122"/>
+                <a:cs typeface="Plus Jakarta Sans" pitchFamily="34" charset="-120"/>
+              </a:rPr>
+              <a:t>SOCIAL</a:t>
+            </a:r>
+            <a:endParaRPr lang="en-US" sz="1000" dirty="0"/>
+          </a:p>
+        </p:txBody>
+      </p:sp>
+      <p:sp>
+        <p:nvSpPr>
+          <p:cNvPr id="12" name="Text 9"/>
+          <p:cNvSpPr txBox="1"/>
+          <p:nvPr/>
+        </p:nvSpPr>
+        <p:spPr>
+          <a:xfrm>
+            <a:off x="1874520" y="5166360"/>
+            <a:ext cx="4107028" cy="310896"/>
+          </a:xfrm>
+          <a:prstGeom prst="rect">
+            <a:avLst/>
+          </a:prstGeom>
+          <a:noFill/>
+          <a:ln/>
+        </p:spPr>
+        <p:txBody>
+          <a:bodyPr wrap="square" lIns="0" tIns="0" rIns="0" bIns="0" rtlCol="0" anchor="ctr"/>
+          <a:lstStyle/>
+          <a:p>
+            <a:pPr indent="0" marL="0">
+              <a:buNone/>
+            </a:pPr>
+            <a:r>
+              <a:rPr lang="en-US" sz="1800" b="1" dirty="0">
+                <a:solidFill>
+                  <a:srgbClr val="F4F6F5"/>
+                </a:solidFill>
+                <a:latin typeface="Manrope" pitchFamily="34" charset="0"/>
+                <a:ea typeface="Manrope" pitchFamily="34" charset="-122"/>
+                <a:cs typeface="Manrope" pitchFamily="34" charset="-120"/>
+              </a:rPr>
+              <a:t>@bodstudio</a:t>
+            </a:r>
+            <a:endParaRPr lang="en-US" sz="1800" dirty="0"/>
+          </a:p>
+        </p:txBody>
+      </p:sp>
+      <p:pic>
+        <p:nvPicPr>
+          <p:cNvPr id="13" name="Image 1" descr="preencoded.png">    </p:cNvPr>
+          <p:cNvPicPr>
+            <a:picLocks noChangeAspect="1"/>
+          </p:cNvPicPr>
+          <p:nvPr/>
+        </p:nvPicPr>
+        <p:blipFill>
+          <a:blip r:embed="rId2"/>
+          <a:stretch>
+            <a:fillRect/>
+          </a:stretch>
+        </p:blipFill>
+        <p:spPr>
+          <a:xfrm>
+            <a:off x="685800" y="6245352"/>
+            <a:ext cx="365760" cy="365760"/>
+          </a:xfrm>
+          <a:prstGeom prst="rect">
+            <a:avLst/>
+          </a:prstGeom>
+        </p:spPr>
+      </p:pic>
+      <p:sp>
+        <p:nvSpPr>
+          <p:cNvPr id="14" name="Text 10"/>
+          <p:cNvSpPr txBox="1"/>
+          <p:nvPr/>
+        </p:nvSpPr>
+        <p:spPr>
+          <a:xfrm>
+            <a:off x="1188720" y="6355080"/>
+            <a:ext cx="3657600" cy="201168"/>
+          </a:xfrm>
+          <a:prstGeom prst="rect">
+            <a:avLst/>
+          </a:prstGeom>
+          <a:noFill/>
+          <a:ln/>
+        </p:spPr>
+        <p:txBody>
+          <a:bodyPr wrap="square" lIns="0" tIns="0" rIns="0" bIns="0" rtlCol="0" anchor="t"/>
+          <a:lstStyle/>
+          <a:p>
+            <a:pPr indent="0" marL="0">
+              <a:buNone/>
+            </a:pPr>
+            <a:r>
+              <a:rPr lang="en-US" sz="1000" b="1" spc="200" kern="0" dirty="0">
+                <a:solidFill>
+                  <a:srgbClr val="9AA7A2"/>
+                </a:solidFill>
+                <a:latin typeface="Plus Jakarta Sans" pitchFamily="34" charset="0"/>
+                <a:ea typeface="Plus Jakarta Sans" pitchFamily="34" charset="-122"/>
+                <a:cs typeface="Plus Jakarta Sans" pitchFamily="34" charset="-120"/>
+              </a:rPr>
+              <a:t>POWERED BY BOD STUDIO</a:t>
+            </a:r>
+            <a:endParaRPr lang="en-US" sz="1000" dirty="0"/>
+          </a:p>
+        </p:txBody>
+      </p:sp>
+      <p:pic>
+        <p:nvPicPr>
+          <p:cNvPr id="15" name="Image 2" descr="/tmp/claude-0/-home-user-Claude-Works/c609e3f7-e17f-5f43-8424-4df30cb9a6a9/scratchpad/build/s/img/m_angR_focus_light.png">    </p:cNvPr>
+          <p:cNvPicPr>
+            <a:picLocks noChangeAspect="1"/>
+          </p:cNvPicPr>
+          <p:nvPr/>
+        </p:nvPicPr>
+        <p:blipFill>
+          <a:blip r:embed="rId3"/>
+          <a:stretch>
+            <a:fillRect/>
+          </a:stretch>
+        </p:blipFill>
+        <p:spPr>
+          <a:xfrm>
+            <a:off x="8958496" y="640080"/>
+            <a:ext cx="2547400" cy="5577840"/>
+          </a:xfrm>
+          <a:prstGeom prst="rect">
+            <a:avLst/>
+          </a:prstGeom>
+        </p:spPr>
+      </p:pic>
+      <p:pic>
+        <p:nvPicPr>
+          <p:cNvPr id="16" name="Image 3" descr="/tmp/claude-0/-home-user-Claude-Works/c609e3f7-e17f-5f43-8424-4df30cb9a6a9/scratchpad/build/s/img/annan_waving.png">    </p:cNvPr>
+          <p:cNvPicPr>
+            <a:picLocks noChangeAspect="1"/>
+          </p:cNvPicPr>
+          <p:nvPr/>
+        </p:nvPicPr>
+        <p:blipFill>
+          <a:blip r:embed="rId4"/>
+          <a:stretch>
+            <a:fillRect/>
+          </a:stretch>
+        </p:blipFill>
+        <p:spPr>
+          <a:xfrm>
+            <a:off x="7008766" y="3931920"/>
+            <a:ext cx="2269769" cy="2286000"/>
+          </a:xfrm>
+          <a:prstGeom prst="rect">
+            <a:avLst/>
+          </a:prstGeom>
+        </p:spPr>
+      </p:pic>
+      <p:sp>
+        <p:nvSpPr>
+          <p:cNvPr id="17" name="Shape 11"/>
+          <p:cNvSpPr/>
+          <p:nvPr/>
+        </p:nvSpPr>
+        <p:spPr>
+          <a:xfrm>
+            <a:off x="7356026" y="2970428"/>
+            <a:ext cx="2167235" cy="795528"/>
+          </a:xfrm>
+          <a:prstGeom prst="roundRect">
+            <a:avLst>
+              <a:gd name="adj" fmla="val 20690"/>
+            </a:avLst>
+          </a:prstGeom>
+          <a:solidFill>
+            <a:srgbClr val="F4F6F5"/>
+          </a:solidFill>
+          <a:ln/>
+        </p:spPr>
+      </p:sp>
+      <p:sp>
+        <p:nvSpPr>
+          <p:cNvPr id="18" name="Shape 12"/>
+          <p:cNvSpPr/>
+          <p:nvPr/>
+        </p:nvSpPr>
+        <p:spPr>
+          <a:xfrm rot="10800000">
+            <a:off x="7778963" y="3756812"/>
+            <a:ext cx="237744" cy="182880"/>
+          </a:xfrm>
+          <a:prstGeom prst="triangle">
+            <a:avLst/>
+          </a:prstGeom>
+          <a:solidFill>
+            <a:srgbClr val="F4F6F5"/>
+          </a:solidFill>
+          <a:ln/>
+        </p:spPr>
+      </p:sp>
+      <p:sp>
+        <p:nvSpPr>
+          <p:cNvPr id="19" name="Text 13"/>
+          <p:cNvSpPr txBox="1"/>
+          <p:nvPr/>
+        </p:nvSpPr>
+        <p:spPr>
+          <a:xfrm>
+            <a:off x="7593770" y="3135020"/>
+            <a:ext cx="1691747" cy="466344"/>
+          </a:xfrm>
+          <a:prstGeom prst="rect">
+            <a:avLst/>
+          </a:prstGeom>
+          <a:noFill/>
+          <a:ln/>
+        </p:spPr>
+        <p:txBody>
+          <a:bodyPr wrap="square" lIns="0" tIns="0" rIns="0" bIns="0" rtlCol="0" anchor="ctr"/>
+          <a:lstStyle/>
+          <a:p>
+            <a:pPr indent="0" marL="0">
+              <a:lnSpc>
+                <a:spcPts val="1840"/>
+              </a:lnSpc>
+              <a:buNone/>
+            </a:pPr>
+            <a:r>
+              <a:rPr lang="en-US" sz="1500" b="1" dirty="0">
+                <a:solidFill>
+                  <a:srgbClr val="0B0D0C"/>
+                </a:solidFill>
+                <a:latin typeface="Manrope" pitchFamily="34" charset="0"/>
+                <a:ea typeface="Manrope" pitchFamily="34" charset="-122"/>
+                <a:cs typeface="Manrope" pitchFamily="34" charset="-120"/>
+              </a:rPr>
+              <a:t>Come by. I'll</a:t>
+            </a:r>
+            <a:endParaRPr lang="en-US" sz="1500" dirty="0"/>
+          </a:p>
+          <a:p>
+            <a:pPr indent="0" marL="0">
+              <a:lnSpc>
+                <a:spcPts val="1840"/>
+              </a:lnSpc>
+              <a:buNone/>
+            </a:pPr>
+            <a:r>
+              <a:rPr lang="en-US" sz="1500" b="1" dirty="0">
+                <a:solidFill>
+                  <a:srgbClr val="0B0D0C"/>
+                </a:solidFill>
+                <a:latin typeface="Manrope" pitchFamily="34" charset="0"/>
+                <a:ea typeface="Manrope" pitchFamily="34" charset="-122"/>
+                <a:cs typeface="Manrope" pitchFamily="34" charset="-120"/>
+              </a:rPr>
+              <a:t>show you around.</a:t>
+            </a:r>
+            <a:endParaRPr lang="en-US" sz="1500" dirty="0"/>
           </a:p>
         </p:txBody>
       </p:sp>

--- a/bod-app-sales-deck/samples/Bod-App-Sample-Slides.pptx
+++ b/bod-app-sales-deck/samples/Bod-App-Sample-Slides.pptx
@@ -1436,58 +1436,40 @@
           </a:prstGeom>
         </p:spPr>
       </p:pic>
-      <p:sp>
-        <p:nvSpPr>
-          <p:cNvPr id="11" name="Shape 5"/>
-          <p:cNvSpPr/>
-          <p:nvPr/>
-        </p:nvSpPr>
-        <p:spPr>
-          <a:xfrm>
-            <a:off x="7159841" y="2793291"/>
-            <a:ext cx="2167235" cy="795528"/>
-          </a:xfrm>
-          <a:prstGeom prst="roundRect">
-            <a:avLst>
-              <a:gd name="adj" fmla="val 20690"/>
-            </a:avLst>
-          </a:prstGeom>
-          <a:solidFill>
-            <a:srgbClr val="F4F6F5"/>
-          </a:solidFill>
-          <a:ln/>
-        </p:spPr>
-      </p:sp>
-      <p:sp>
-        <p:nvSpPr>
-          <p:cNvPr id="12" name="Shape 6"/>
-          <p:cNvSpPr/>
-          <p:nvPr/>
-        </p:nvSpPr>
-        <p:spPr>
-          <a:xfrm rot="10800000">
-            <a:off x="7474416" y="3579675"/>
-            <a:ext cx="237744" cy="182880"/>
-          </a:xfrm>
-          <a:prstGeom prst="triangle">
-            <a:avLst/>
-          </a:prstGeom>
-          <a:solidFill>
-            <a:srgbClr val="F4F6F5"/>
-          </a:solidFill>
-          <a:ln/>
-        </p:spPr>
-      </p:sp>
-      <p:sp>
-        <p:nvSpPr>
-          <p:cNvPr id="13" name="Text 7"/>
-          <p:cNvSpPr txBox="1"/>
-          <p:nvPr/>
-        </p:nvSpPr>
-        <p:spPr>
-          <a:xfrm>
-            <a:off x="7397585" y="2957883"/>
-            <a:ext cx="1691747" cy="466344"/>
+      <p:pic>
+        <p:nvPicPr>
+          <p:cNvPr id="11" name="Image 4" descr="preencoded.png">    </p:cNvPr>
+          <p:cNvPicPr>
+            <a:picLocks noChangeAspect="1"/>
+          </p:cNvPicPr>
+          <p:nvPr/>
+        </p:nvPicPr>
+        <p:blipFill>
+          <a:blip r:embed="rId5"/>
+          <a:stretch>
+            <a:fillRect/>
+          </a:stretch>
+        </p:blipFill>
+        <p:spPr>
+          <a:xfrm>
+            <a:off x="7052861" y="2692707"/>
+            <a:ext cx="2340110" cy="1143000"/>
+          </a:xfrm>
+          <a:prstGeom prst="rect">
+            <a:avLst/>
+          </a:prstGeom>
+        </p:spPr>
+      </p:pic>
+      <p:sp>
+        <p:nvSpPr>
+          <p:cNvPr id="12" name="Text 5"/>
+          <p:cNvSpPr txBox="1"/>
+          <p:nvPr/>
+        </p:nvSpPr>
+        <p:spPr>
+          <a:xfrm>
+            <a:off x="7372901" y="2912163"/>
+            <a:ext cx="1718318" cy="466344"/>
           </a:xfrm>
           <a:prstGeom prst="rect">
             <a:avLst/>
@@ -1763,113 +1745,9 @@
           </a:prstGeom>
         </p:spPr>
       </p:pic>
-      <p:sp>
-        <p:nvSpPr>
-          <p:cNvPr id="7" name="Shape 3"/>
-          <p:cNvSpPr/>
-          <p:nvPr/>
-        </p:nvSpPr>
-        <p:spPr>
-          <a:xfrm>
-            <a:off x="368752" y="3456121"/>
-            <a:ext cx="2814816" cy="795528"/>
-          </a:xfrm>
-          <a:prstGeom prst="roundRect">
-            <a:avLst>
-              <a:gd name="adj" fmla="val 20690"/>
-            </a:avLst>
-          </a:prstGeom>
-          <a:solidFill>
-            <a:srgbClr val="F4F6F5"/>
-          </a:solidFill>
-          <a:ln/>
-        </p:spPr>
-      </p:sp>
-      <p:sp>
-        <p:nvSpPr>
-          <p:cNvPr id="8" name="Shape 4"/>
-          <p:cNvSpPr/>
-          <p:nvPr/>
-        </p:nvSpPr>
-        <p:spPr>
-          <a:xfrm rot="10800000">
-            <a:off x="1150621" y="4242505"/>
-            <a:ext cx="237744" cy="182880"/>
-          </a:xfrm>
-          <a:prstGeom prst="triangle">
-            <a:avLst/>
-          </a:prstGeom>
-          <a:solidFill>
-            <a:srgbClr val="F4F6F5"/>
-          </a:solidFill>
-          <a:ln/>
-        </p:spPr>
-      </p:sp>
-      <p:sp>
-        <p:nvSpPr>
-          <p:cNvPr id="9" name="Text 5"/>
-          <p:cNvSpPr txBox="1"/>
-          <p:nvPr/>
-        </p:nvSpPr>
-        <p:spPr>
-          <a:xfrm>
-            <a:off x="606496" y="3620713"/>
-            <a:ext cx="2339328" cy="466344"/>
-          </a:xfrm>
-          <a:prstGeom prst="rect">
-            <a:avLst/>
-          </a:prstGeom>
-          <a:noFill/>
-          <a:ln/>
-        </p:spPr>
-        <p:txBody>
-          <a:bodyPr wrap="square" lIns="0" tIns="0" rIns="0" bIns="0" rtlCol="0" anchor="ctr"/>
-          <a:lstStyle/>
-          <a:p>
-            <a:pPr indent="0" marL="0">
-              <a:lnSpc>
-                <a:spcPts val="1840"/>
-              </a:lnSpc>
-              <a:buNone/>
-            </a:pPr>
-            <a:r>
-              <a:rPr lang="en-US" sz="1500" b="1" dirty="0">
-                <a:solidFill>
-                  <a:srgbClr val="0B0D0C"/>
-                </a:solidFill>
-                <a:latin typeface="Manrope" pitchFamily="34" charset="0"/>
-                <a:ea typeface="Manrope" pitchFamily="34" charset="-122"/>
-                <a:cs typeface="Manrope" pitchFamily="34" charset="-120"/>
-              </a:rPr>
-              <a:t>No reply yet? I've written</a:t>
-            </a:r>
-            <a:endParaRPr lang="en-US" sz="1500" dirty="0"/>
-          </a:p>
-          <a:p>
-            <a:pPr indent="0" marL="0">
-              <a:lnSpc>
-                <a:spcPts val="1840"/>
-              </a:lnSpc>
-              <a:buNone/>
-            </a:pPr>
-            <a:r>
-              <a:rPr lang="en-US" sz="1500" b="1" dirty="0">
-                <a:solidFill>
-                  <a:srgbClr val="0B0D0C"/>
-                </a:solidFill>
-                <a:latin typeface="Manrope" pitchFamily="34" charset="0"/>
-                <a:ea typeface="Manrope" pitchFamily="34" charset="-122"/>
-                <a:cs typeface="Manrope" pitchFamily="34" charset="-120"/>
-              </a:rPr>
-              <a:t>the follow-up for you.</a:t>
-            </a:r>
-            <a:endParaRPr lang="en-US" sz="1500" dirty="0"/>
-          </a:p>
-        </p:txBody>
-      </p:sp>
       <p:pic>
         <p:nvPicPr>
-          <p:cNvPr id="10" name="Image 2" descr="/tmp/claude-0/-home-user-Claude-Works/c609e3f7-e17f-5f43-8424-4df30cb9a6a9/scratchpad/build/s/img/m_front_nudge_light.png">    </p:cNvPr>
+          <p:cNvPr id="7" name="Image 2" descr="preencoded.png">    </p:cNvPr>
           <p:cNvPicPr>
             <a:picLocks noChangeAspect="1"/>
           </p:cNvPicPr>
@@ -1883,17 +1761,79 @@
         </p:blipFill>
         <p:spPr>
           <a:xfrm>
-            <a:off x="9163669" y="1325880"/>
-            <a:ext cx="2342226" cy="4846320"/>
+            <a:off x="348802" y="3355537"/>
+            <a:ext cx="3008011" cy="1143000"/>
           </a:xfrm>
           <a:prstGeom prst="rect">
             <a:avLst/>
           </a:prstGeom>
         </p:spPr>
       </p:pic>
+      <p:sp>
+        <p:nvSpPr>
+          <p:cNvPr id="8" name="Text 3"/>
+          <p:cNvSpPr txBox="1"/>
+          <p:nvPr/>
+        </p:nvSpPr>
+        <p:spPr>
+          <a:xfrm>
+            <a:off x="668842" y="3574993"/>
+            <a:ext cx="2386219" cy="466344"/>
+          </a:xfrm>
+          <a:prstGeom prst="rect">
+            <a:avLst/>
+          </a:prstGeom>
+          <a:noFill/>
+          <a:ln/>
+        </p:spPr>
+        <p:txBody>
+          <a:bodyPr wrap="square" lIns="0" tIns="0" rIns="0" bIns="0" rtlCol="0" anchor="ctr"/>
+          <a:lstStyle/>
+          <a:p>
+            <a:pPr indent="0" marL="0">
+              <a:lnSpc>
+                <a:spcPts val="1840"/>
+              </a:lnSpc>
+              <a:buNone/>
+            </a:pPr>
+            <a:r>
+              <a:rPr lang="en-US" sz="1500" b="1" dirty="0">
+                <a:solidFill>
+                  <a:srgbClr val="0B0D0C"/>
+                </a:solidFill>
+                <a:latin typeface="Manrope" pitchFamily="34" charset="0"/>
+                <a:ea typeface="Manrope" pitchFamily="34" charset="-122"/>
+                <a:cs typeface="Manrope" pitchFamily="34" charset="-120"/>
+              </a:rPr>
+              <a:t>No reply yet? I've written</a:t>
+            </a:r>
+            <a:endParaRPr lang="en-US" sz="1500" dirty="0"/>
+          </a:p>
+          <a:p>
+            <a:pPr indent="0" marL="0">
+              <a:lnSpc>
+                <a:spcPts val="1840"/>
+              </a:lnSpc>
+              <a:buNone/>
+            </a:pPr>
+            <a:r>
+              <a:rPr lang="en-US" sz="1500" b="1" dirty="0">
+                <a:solidFill>
+                  <a:srgbClr val="0B0D0C"/>
+                </a:solidFill>
+                <a:latin typeface="Manrope" pitchFamily="34" charset="0"/>
+                <a:ea typeface="Manrope" pitchFamily="34" charset="-122"/>
+                <a:cs typeface="Manrope" pitchFamily="34" charset="-120"/>
+              </a:rPr>
+              <a:t>the follow-up for you.</a:t>
+            </a:r>
+            <a:endParaRPr lang="en-US" sz="1500" dirty="0"/>
+          </a:p>
+        </p:txBody>
+      </p:sp>
       <p:pic>
         <p:nvPicPr>
-          <p:cNvPr id="11" name="Image 3" descr="/tmp/claude-0/-home-user-Claude-Works/c609e3f7-e17f-5f43-8424-4df30cb9a6a9/scratchpad/build/s/img/m_front_nudge_dark.png">    </p:cNvPr>
+          <p:cNvPr id="9" name="Image 3" descr="/tmp/claude-0/-home-user-Claude-Works/c609e3f7-e17f-5f43-8424-4df30cb9a6a9/scratchpad/build/s/img/m_front_nudge_light.png">    </p:cNvPr>
           <p:cNvPicPr>
             <a:picLocks noChangeAspect="1"/>
           </p:cNvPicPr>
@@ -1907,6 +1847,30 @@
         </p:blipFill>
         <p:spPr>
           <a:xfrm>
+            <a:off x="9163669" y="1325880"/>
+            <a:ext cx="2342226" cy="4846320"/>
+          </a:xfrm>
+          <a:prstGeom prst="rect">
+            <a:avLst/>
+          </a:prstGeom>
+        </p:spPr>
+      </p:pic>
+      <p:pic>
+        <p:nvPicPr>
+          <p:cNvPr id="10" name="Image 4" descr="/tmp/claude-0/-home-user-Claude-Works/c609e3f7-e17f-5f43-8424-4df30cb9a6a9/scratchpad/build/s/img/m_front_nudge_dark.png">    </p:cNvPr>
+          <p:cNvPicPr>
+            <a:picLocks noChangeAspect="1"/>
+          </p:cNvPicPr>
+          <p:nvPr/>
+        </p:nvPicPr>
+        <p:blipFill>
+          <a:blip r:embed="rId5"/>
+          <a:stretch>
+            <a:fillRect/>
+          </a:stretch>
+        </p:blipFill>
+        <p:spPr>
+          <a:xfrm>
             <a:off x="7130872" y="685800"/>
             <a:ext cx="2651577" cy="5486400"/>
           </a:xfrm>
@@ -1917,7 +1881,7 @@
       </p:pic>
       <p:sp>
         <p:nvSpPr>
-          <p:cNvPr id="12" name="Text 6"/>
+          <p:cNvPr id="11" name="Text 4"/>
           <p:cNvSpPr txBox="1"/>
           <p:nvPr/>
         </p:nvSpPr>
@@ -1956,7 +1920,7 @@
       </p:sp>
       <p:sp>
         <p:nvSpPr>
-          <p:cNvPr id="13" name="Text 7"/>
+          <p:cNvPr id="12" name="Text 5"/>
           <p:cNvSpPr txBox="1"/>
           <p:nvPr/>
         </p:nvSpPr>
@@ -1995,7 +1959,7 @@
       </p:sp>
       <p:sp>
         <p:nvSpPr>
-          <p:cNvPr id="14" name="Text 8"/>
+          <p:cNvPr id="13" name="Text 6"/>
           <p:cNvSpPr txBox="1"/>
           <p:nvPr/>
         </p:nvSpPr>
@@ -2189,7 +2153,7 @@
         </p:nvSpPr>
         <p:spPr>
           <a:xfrm>
-            <a:off x="1554480" y="3223260"/>
+            <a:off x="1554480" y="3543300"/>
             <a:ext cx="8912108" cy="0"/>
           </a:xfrm>
           <a:prstGeom prst="line">
@@ -2212,7 +2176,7 @@
         </p:nvSpPr>
         <p:spPr>
           <a:xfrm>
-            <a:off x="685800" y="2788920"/>
+            <a:off x="685800" y="3108960"/>
             <a:ext cx="868680" cy="868680"/>
           </a:xfrm>
           <a:prstGeom prst="ellipse">
@@ -2245,7 +2209,7 @@
         </p:blipFill>
         <p:spPr>
           <a:xfrm>
-            <a:off x="929030" y="3032150"/>
+            <a:off x="929030" y="3352190"/>
             <a:ext cx="382219" cy="382219"/>
           </a:xfrm>
           <a:prstGeom prst="rect">
@@ -2261,7 +2225,7 @@
         </p:nvSpPr>
         <p:spPr>
           <a:xfrm>
-            <a:off x="685800" y="3977640"/>
+            <a:off x="685800" y="4297680"/>
             <a:ext cx="1907987" cy="201168"/>
           </a:xfrm>
           <a:prstGeom prst="rect">
@@ -2300,7 +2264,7 @@
         </p:nvSpPr>
         <p:spPr>
           <a:xfrm>
-            <a:off x="685800" y="4251960"/>
+            <a:off x="685800" y="4572000"/>
             <a:ext cx="1907987" cy="731520"/>
           </a:xfrm>
           <a:prstGeom prst="rect">
@@ -2342,7 +2306,7 @@
         </p:nvSpPr>
         <p:spPr>
           <a:xfrm>
-            <a:off x="685800" y="5074920"/>
+            <a:off x="685800" y="5394960"/>
             <a:ext cx="1907987" cy="640080"/>
           </a:xfrm>
           <a:prstGeom prst="rect">
@@ -2384,7 +2348,7 @@
         </p:nvSpPr>
         <p:spPr>
           <a:xfrm>
-            <a:off x="2913827" y="2788920"/>
+            <a:off x="2913827" y="3108960"/>
             <a:ext cx="868680" cy="868680"/>
           </a:xfrm>
           <a:prstGeom prst="ellipse">
@@ -2417,7 +2381,7 @@
         </p:blipFill>
         <p:spPr>
           <a:xfrm>
-            <a:off x="3157057" y="3032150"/>
+            <a:off x="3157057" y="3352190"/>
             <a:ext cx="382219" cy="382219"/>
           </a:xfrm>
           <a:prstGeom prst="rect">
@@ -2433,7 +2397,7 @@
         </p:nvSpPr>
         <p:spPr>
           <a:xfrm>
-            <a:off x="2913827" y="3977640"/>
+            <a:off x="2913827" y="4297680"/>
             <a:ext cx="1907987" cy="201168"/>
           </a:xfrm>
           <a:prstGeom prst="rect">
@@ -2472,7 +2436,7 @@
         </p:nvSpPr>
         <p:spPr>
           <a:xfrm>
-            <a:off x="2913827" y="4251960"/>
+            <a:off x="2913827" y="4572000"/>
             <a:ext cx="1907987" cy="731520"/>
           </a:xfrm>
           <a:prstGeom prst="rect">
@@ -2514,7 +2478,7 @@
         </p:nvSpPr>
         <p:spPr>
           <a:xfrm>
-            <a:off x="2913827" y="5074920"/>
+            <a:off x="2913827" y="5394960"/>
             <a:ext cx="1907987" cy="640080"/>
           </a:xfrm>
           <a:prstGeom prst="rect">
@@ -2556,7 +2520,7 @@
         </p:nvSpPr>
         <p:spPr>
           <a:xfrm>
-            <a:off x="5141854" y="2788920"/>
+            <a:off x="5141854" y="3108960"/>
             <a:ext cx="868680" cy="868680"/>
           </a:xfrm>
           <a:prstGeom prst="ellipse">
@@ -2589,7 +2553,7 @@
         </p:blipFill>
         <p:spPr>
           <a:xfrm>
-            <a:off x="5385084" y="3032150"/>
+            <a:off x="5385084" y="3352190"/>
             <a:ext cx="382219" cy="382219"/>
           </a:xfrm>
           <a:prstGeom prst="rect">
@@ -2605,7 +2569,7 @@
         </p:nvSpPr>
         <p:spPr>
           <a:xfrm>
-            <a:off x="5141854" y="3977640"/>
+            <a:off x="5141854" y="4297680"/>
             <a:ext cx="1907987" cy="201168"/>
           </a:xfrm>
           <a:prstGeom prst="rect">
@@ -2644,7 +2608,7 @@
         </p:nvSpPr>
         <p:spPr>
           <a:xfrm>
-            <a:off x="5141854" y="4251960"/>
+            <a:off x="5141854" y="4572000"/>
             <a:ext cx="1907987" cy="731520"/>
           </a:xfrm>
           <a:prstGeom prst="rect">
@@ -2686,7 +2650,7 @@
         </p:nvSpPr>
         <p:spPr>
           <a:xfrm>
-            <a:off x="5141854" y="5074920"/>
+            <a:off x="5141854" y="5394960"/>
             <a:ext cx="1907987" cy="640080"/>
           </a:xfrm>
           <a:prstGeom prst="rect">
@@ -2728,7 +2692,7 @@
         </p:nvSpPr>
         <p:spPr>
           <a:xfrm>
-            <a:off x="7369881" y="2788920"/>
+            <a:off x="7369881" y="3108960"/>
             <a:ext cx="868680" cy="868680"/>
           </a:xfrm>
           <a:prstGeom prst="ellipse">
@@ -2761,7 +2725,7 @@
         </p:blipFill>
         <p:spPr>
           <a:xfrm>
-            <a:off x="7613112" y="3032150"/>
+            <a:off x="7613112" y="3352190"/>
             <a:ext cx="382219" cy="382219"/>
           </a:xfrm>
           <a:prstGeom prst="rect">
@@ -2777,7 +2741,7 @@
         </p:nvSpPr>
         <p:spPr>
           <a:xfrm>
-            <a:off x="7369881" y="3977640"/>
+            <a:off x="7369881" y="4297680"/>
             <a:ext cx="1907987" cy="201168"/>
           </a:xfrm>
           <a:prstGeom prst="rect">
@@ -2816,7 +2780,7 @@
         </p:nvSpPr>
         <p:spPr>
           <a:xfrm>
-            <a:off x="7369881" y="4251960"/>
+            <a:off x="7369881" y="4572000"/>
             <a:ext cx="1907987" cy="731520"/>
           </a:xfrm>
           <a:prstGeom prst="rect">
@@ -2858,7 +2822,7 @@
         </p:nvSpPr>
         <p:spPr>
           <a:xfrm>
-            <a:off x="7369881" y="5074920"/>
+            <a:off x="7369881" y="5394960"/>
             <a:ext cx="1907987" cy="640080"/>
           </a:xfrm>
           <a:prstGeom prst="rect">
@@ -2900,7 +2864,7 @@
         </p:nvSpPr>
         <p:spPr>
           <a:xfrm>
-            <a:off x="9597908" y="2788920"/>
+            <a:off x="9597908" y="3108960"/>
             <a:ext cx="868680" cy="868680"/>
           </a:xfrm>
           <a:prstGeom prst="ellipse">
@@ -2933,7 +2897,7 @@
         </p:blipFill>
         <p:spPr>
           <a:xfrm>
-            <a:off x="9841139" y="3032150"/>
+            <a:off x="9841139" y="3352190"/>
             <a:ext cx="382219" cy="382219"/>
           </a:xfrm>
           <a:prstGeom prst="rect">
@@ -2949,7 +2913,7 @@
         </p:nvSpPr>
         <p:spPr>
           <a:xfrm>
-            <a:off x="9597908" y="3977640"/>
+            <a:off x="9597908" y="4297680"/>
             <a:ext cx="1907987" cy="201168"/>
           </a:xfrm>
           <a:prstGeom prst="rect">
@@ -2988,7 +2952,7 @@
         </p:nvSpPr>
         <p:spPr>
           <a:xfrm>
-            <a:off x="9597908" y="4251960"/>
+            <a:off x="9597908" y="4572000"/>
             <a:ext cx="1907987" cy="731520"/>
           </a:xfrm>
           <a:prstGeom prst="rect">
@@ -3030,7 +2994,7 @@
         </p:nvSpPr>
         <p:spPr>
           <a:xfrm>
-            <a:off x="9597908" y="5074920"/>
+            <a:off x="9597908" y="5394960"/>
             <a:ext cx="1907987" cy="640080"/>
           </a:xfrm>
           <a:prstGeom prst="rect">
@@ -3080,66 +3044,48 @@
         </p:blipFill>
         <p:spPr>
           <a:xfrm>
-            <a:off x="10134419" y="548640"/>
-            <a:ext cx="1481205" cy="1783080"/>
+            <a:off x="10457947" y="1572768"/>
+            <a:ext cx="1139388" cy="1371600"/>
           </a:xfrm>
           <a:prstGeom prst="rect">
             <a:avLst/>
           </a:prstGeom>
         </p:spPr>
       </p:pic>
-      <p:sp>
-        <p:nvSpPr>
-          <p:cNvPr id="32" name="Shape 24"/>
-          <p:cNvSpPr/>
-          <p:nvPr/>
-        </p:nvSpPr>
-        <p:spPr>
-          <a:xfrm>
-            <a:off x="7580991" y="803483"/>
-            <a:ext cx="2497872" cy="795528"/>
-          </a:xfrm>
-          <a:prstGeom prst="roundRect">
-            <a:avLst>
-              <a:gd name="adj" fmla="val 20690"/>
-            </a:avLst>
-          </a:prstGeom>
-          <a:solidFill>
-            <a:srgbClr val="F4F6F5"/>
-          </a:solidFill>
-          <a:ln/>
-        </p:spPr>
-      </p:sp>
-      <p:sp>
-        <p:nvSpPr>
-          <p:cNvPr id="33" name="Shape 25"/>
-          <p:cNvSpPr/>
-          <p:nvPr/>
-        </p:nvSpPr>
-        <p:spPr>
-          <a:xfrm rot="5400000">
-            <a:off x="10042287" y="1082375"/>
-            <a:ext cx="237744" cy="182880"/>
-          </a:xfrm>
-          <a:prstGeom prst="triangle">
-            <a:avLst/>
-          </a:prstGeom>
-          <a:solidFill>
-            <a:srgbClr val="F4F6F5"/>
-          </a:solidFill>
-          <a:ln/>
-        </p:spPr>
-      </p:sp>
-      <p:sp>
-        <p:nvSpPr>
-          <p:cNvPr id="34" name="Text 26"/>
-          <p:cNvSpPr txBox="1"/>
-          <p:nvPr/>
-        </p:nvSpPr>
-        <p:spPr>
-          <a:xfrm>
-            <a:off x="7818735" y="968075"/>
-            <a:ext cx="2022384" cy="466344"/>
+      <p:pic>
+        <p:nvPicPr>
+          <p:cNvPr id="32" name="Image 6" descr="preencoded.png">    </p:cNvPr>
+          <p:cNvPicPr>
+            <a:picLocks noChangeAspect="1"/>
+          </p:cNvPicPr>
+          <p:nvPr/>
+        </p:nvPicPr>
+        <p:blipFill>
+          <a:blip r:embed="rId7"/>
+          <a:stretch>
+            <a:fillRect/>
+          </a:stretch>
+        </p:blipFill>
+        <p:spPr>
+          <a:xfrm>
+            <a:off x="8194918" y="481980"/>
+            <a:ext cx="2741501" cy="1143000"/>
+          </a:xfrm>
+          <a:prstGeom prst="rect">
+            <a:avLst/>
+          </a:prstGeom>
+        </p:spPr>
+      </p:pic>
+      <p:sp>
+        <p:nvSpPr>
+          <p:cNvPr id="33" name="Text 24"/>
+          <p:cNvSpPr txBox="1"/>
+          <p:nvPr/>
+        </p:nvSpPr>
+        <p:spPr>
+          <a:xfrm>
+            <a:off x="8514958" y="701436"/>
+            <a:ext cx="2055701" cy="466344"/>
           </a:xfrm>
           <a:prstGeom prst="rect">
             <a:avLst/>
@@ -3194,7 +3140,7 @@
       </p:sp>
       <p:sp>
         <p:nvSpPr>
-          <p:cNvPr id="35" name="Text 27"/>
+          <p:cNvPr id="34" name="Text 25"/>
           <p:cNvSpPr txBox="1"/>
           <p:nvPr/>
         </p:nvSpPr>
@@ -3233,7 +3179,7 @@
       </p:sp>
       <p:sp>
         <p:nvSpPr>
-          <p:cNvPr id="36" name="Text 28"/>
+          <p:cNvPr id="35" name="Text 26"/>
           <p:cNvSpPr txBox="1"/>
           <p:nvPr/>
         </p:nvSpPr>
@@ -3850,58 +3796,40 @@
           </a:prstGeom>
         </p:spPr>
       </p:pic>
-      <p:sp>
-        <p:nvSpPr>
-          <p:cNvPr id="17" name="Shape 11"/>
-          <p:cNvSpPr/>
-          <p:nvPr/>
-        </p:nvSpPr>
-        <p:spPr>
-          <a:xfrm>
-            <a:off x="7356026" y="2970428"/>
-            <a:ext cx="2167235" cy="795528"/>
-          </a:xfrm>
-          <a:prstGeom prst="roundRect">
-            <a:avLst>
-              <a:gd name="adj" fmla="val 20690"/>
-            </a:avLst>
-          </a:prstGeom>
-          <a:solidFill>
-            <a:srgbClr val="F4F6F5"/>
-          </a:solidFill>
-          <a:ln/>
-        </p:spPr>
-      </p:sp>
-      <p:sp>
-        <p:nvSpPr>
-          <p:cNvPr id="18" name="Shape 12"/>
-          <p:cNvSpPr/>
-          <p:nvPr/>
-        </p:nvSpPr>
-        <p:spPr>
-          <a:xfrm rot="10800000">
-            <a:off x="7778963" y="3756812"/>
-            <a:ext cx="237744" cy="182880"/>
-          </a:xfrm>
-          <a:prstGeom prst="triangle">
-            <a:avLst/>
-          </a:prstGeom>
-          <a:solidFill>
-            <a:srgbClr val="F4F6F5"/>
-          </a:solidFill>
-          <a:ln/>
-        </p:spPr>
-      </p:sp>
-      <p:sp>
-        <p:nvSpPr>
-          <p:cNvPr id="19" name="Text 13"/>
-          <p:cNvSpPr txBox="1"/>
-          <p:nvPr/>
-        </p:nvSpPr>
-        <p:spPr>
-          <a:xfrm>
-            <a:off x="7593770" y="3135020"/>
-            <a:ext cx="1691747" cy="466344"/>
+      <p:pic>
+        <p:nvPicPr>
+          <p:cNvPr id="17" name="Image 4" descr="preencoded.png">    </p:cNvPr>
+          <p:cNvPicPr>
+            <a:picLocks noChangeAspect="1"/>
+          </p:cNvPicPr>
+          <p:nvPr/>
+        </p:nvPicPr>
+        <p:blipFill>
+          <a:blip r:embed="rId5"/>
+          <a:stretch>
+            <a:fillRect/>
+          </a:stretch>
+        </p:blipFill>
+        <p:spPr>
+          <a:xfrm>
+            <a:off x="7289947" y="2869844"/>
+            <a:ext cx="2340110" cy="1143000"/>
+          </a:xfrm>
+          <a:prstGeom prst="rect">
+            <a:avLst/>
+          </a:prstGeom>
+        </p:spPr>
+      </p:pic>
+      <p:sp>
+        <p:nvSpPr>
+          <p:cNvPr id="18" name="Text 11"/>
+          <p:cNvSpPr txBox="1"/>
+          <p:nvPr/>
+        </p:nvSpPr>
+        <p:spPr>
+          <a:xfrm>
+            <a:off x="7609987" y="3089300"/>
+            <a:ext cx="1718318" cy="466344"/>
           </a:xfrm>
           <a:prstGeom prst="rect">
             <a:avLst/>
